--- a/docs/pitch-decks/investor-100/pptx/090-sands-capital.pptx
+++ b/docs/pitch-decks/investor-100/pptx/090-sands-capital.pptx
@@ -1769,6 +1769,10 @@
           </a:solidFill>
           <a:ln/>
         </p:spPr>
+        <p:txBody>
+          <a:bodyPr/>
+          <a:p/>
+        </p:txBody>
       </p:sp>
       <p:sp>
         <p:nvSpPr>
@@ -1936,6 +1940,10 @@
             <a:prstDash val="solid"/>
           </a:ln>
         </p:spPr>
+        <p:txBody>
+          <a:bodyPr/>
+          <a:p/>
+        </p:txBody>
       </p:sp>
       <p:sp>
         <p:nvSpPr>
@@ -2045,6 +2053,30 @@
           </a:p>
         </p:txBody>
       </p:sp>
+      <p:pic>
+        <p:nvPicPr>
+          <p:cNvPr id="13" name="Picture 12" descr="04-dcii-dashboard.png"/>
+          <p:cNvPicPr>
+            <a:picLocks noChangeAspect="1"/>
+          </p:cNvPicPr>
+          <p:nvPr/>
+        </p:nvPicPr>
+        <p:blipFill>
+          <a:blip r:embed="rId3"/>
+          <a:stretch>
+            <a:fillRect/>
+          </a:stretch>
+        </p:blipFill>
+        <p:spPr>
+          <a:xfrm>
+            <a:off x="6885432" y="1371600"/>
+            <a:ext cx="5029200" cy="3108960"/>
+          </a:xfrm>
+          <a:prstGeom prst="rect">
+            <a:avLst/>
+          </a:prstGeom>
+        </p:spPr>
+      </p:pic>
     </p:spTree>
   </p:cSld>
   <p:clrMapOvr>
@@ -2242,6 +2274,10 @@
           </a:solidFill>
           <a:ln/>
         </p:spPr>
+        <p:txBody>
+          <a:bodyPr/>
+          <a:p/>
+        </p:txBody>
       </p:sp>
       <p:sp>
         <p:nvSpPr>
@@ -2300,6 +2336,10 @@
           </a:solidFill>
           <a:ln/>
         </p:spPr>
+        <p:txBody>
+          <a:bodyPr/>
+          <a:p/>
+        </p:txBody>
       </p:sp>
       <p:sp>
         <p:nvSpPr>
@@ -2358,6 +2398,10 @@
           </a:solidFill>
           <a:ln/>
         </p:spPr>
+        <p:txBody>
+          <a:bodyPr/>
+          <a:p/>
+        </p:txBody>
       </p:sp>
       <p:sp>
         <p:nvSpPr>
@@ -2416,6 +2460,10 @@
           </a:solidFill>
           <a:ln/>
         </p:spPr>
+        <p:txBody>
+          <a:bodyPr/>
+          <a:p/>
+        </p:txBody>
       </p:sp>
       <p:sp>
         <p:nvSpPr>
@@ -2797,6 +2845,10 @@
           </a:solidFill>
           <a:ln/>
         </p:spPr>
+        <p:txBody>
+          <a:bodyPr/>
+          <a:p/>
+        </p:txBody>
       </p:sp>
       <p:sp>
         <p:nvSpPr>
@@ -2894,6 +2946,10 @@
           </a:solidFill>
           <a:ln/>
         </p:spPr>
+        <p:txBody>
+          <a:bodyPr/>
+          <a:p/>
+        </p:txBody>
       </p:sp>
       <p:sp>
         <p:nvSpPr>
@@ -3136,6 +3192,30 @@
           </a:p>
         </p:txBody>
       </p:sp>
+      <p:pic>
+        <p:nvPicPr>
+          <p:cNvPr id="16" name="Picture 15" descr="07-graph-explorer.png"/>
+          <p:cNvPicPr>
+            <a:picLocks noChangeAspect="1"/>
+          </p:cNvPicPr>
+          <p:nvPr/>
+        </p:nvPicPr>
+        <p:blipFill>
+          <a:blip r:embed="rId3"/>
+          <a:stretch>
+            <a:fillRect/>
+          </a:stretch>
+        </p:blipFill>
+        <p:spPr>
+          <a:xfrm>
+            <a:off x="6885432" y="1371600"/>
+            <a:ext cx="5029200" cy="3108960"/>
+          </a:xfrm>
+          <a:prstGeom prst="rect">
+            <a:avLst/>
+          </a:prstGeom>
+        </p:spPr>
+      </p:pic>
     </p:spTree>
   </p:cSld>
   <p:clrMapOvr>
@@ -3409,6 +3489,10 @@
           </a:solidFill>
           <a:ln/>
         </p:spPr>
+        <p:txBody>
+          <a:bodyPr/>
+          <a:p/>
+        </p:txBody>
       </p:sp>
       <p:sp>
         <p:nvSpPr>
@@ -3503,6 +3587,10 @@
           </a:solidFill>
           <a:ln/>
         </p:spPr>
+        <p:txBody>
+          <a:bodyPr/>
+          <a:p/>
+        </p:txBody>
       </p:sp>
       <p:sp>
         <p:nvSpPr>
@@ -3597,6 +3685,10 @@
           </a:solidFill>
           <a:ln/>
         </p:spPr>
+        <p:txBody>
+          <a:bodyPr/>
+          <a:p/>
+        </p:txBody>
       </p:sp>
       <p:sp>
         <p:nvSpPr>
@@ -3691,6 +3783,10 @@
           </a:solidFill>
           <a:ln/>
         </p:spPr>
+        <p:txBody>
+          <a:bodyPr/>
+          <a:p/>
+        </p:txBody>
       </p:sp>
       <p:sp>
         <p:nvSpPr>
@@ -3836,6 +3932,30 @@
           </a:p>
         </p:txBody>
       </p:sp>
+      <p:pic>
+        <p:nvPicPr>
+          <p:cNvPr id="20" name="Picture 19" descr="image.png"/>
+          <p:cNvPicPr>
+            <a:picLocks noChangeAspect="1"/>
+          </p:cNvPicPr>
+          <p:nvPr/>
+        </p:nvPicPr>
+        <p:blipFill>
+          <a:blip r:embed="rId3"/>
+          <a:stretch>
+            <a:fillRect/>
+          </a:stretch>
+        </p:blipFill>
+        <p:spPr>
+          <a:xfrm>
+            <a:off x="6885432" y="1371600"/>
+            <a:ext cx="5029200" cy="3108960"/>
+          </a:xfrm>
+          <a:prstGeom prst="rect">
+            <a:avLst/>
+          </a:prstGeom>
+        </p:spPr>
+      </p:pic>
     </p:spTree>
   </p:cSld>
   <p:clrMapOvr>
@@ -4127,6 +4247,10 @@
           </a:solidFill>
           <a:ln/>
         </p:spPr>
+        <p:txBody>
+          <a:bodyPr/>
+          <a:p/>
+        </p:txBody>
       </p:sp>
       <p:sp>
         <p:nvSpPr>
@@ -4221,6 +4345,10 @@
           </a:solidFill>
           <a:ln/>
         </p:spPr>
+        <p:txBody>
+          <a:bodyPr/>
+          <a:p/>
+        </p:txBody>
       </p:sp>
       <p:sp>
         <p:nvSpPr>
@@ -4279,6 +4407,10 @@
           </a:solidFill>
           <a:ln/>
         </p:spPr>
+        <p:txBody>
+          <a:bodyPr/>
+          <a:p/>
+        </p:txBody>
       </p:sp>
       <p:sp>
         <p:nvSpPr>
@@ -4427,6 +4559,30 @@
           </a:p>
         </p:txBody>
       </p:sp>
+      <p:pic>
+        <p:nvPicPr>
+          <p:cNvPr id="16" name="Picture 15" descr="image.png"/>
+          <p:cNvPicPr>
+            <a:picLocks noChangeAspect="1"/>
+          </p:cNvPicPr>
+          <p:nvPr/>
+        </p:nvPicPr>
+        <p:blipFill>
+          <a:blip r:embed="rId3"/>
+          <a:stretch>
+            <a:fillRect/>
+          </a:stretch>
+        </p:blipFill>
+        <p:spPr>
+          <a:xfrm>
+            <a:off x="6885432" y="1371600"/>
+            <a:ext cx="5029200" cy="3108960"/>
+          </a:xfrm>
+          <a:prstGeom prst="rect">
+            <a:avLst/>
+          </a:prstGeom>
+        </p:spPr>
+      </p:pic>
     </p:spTree>
   </p:cSld>
   <p:clrMapOvr>
@@ -4588,6 +4744,10 @@
           </a:solidFill>
           <a:ln/>
         </p:spPr>
+        <p:txBody>
+          <a:bodyPr/>
+          <a:p/>
+        </p:txBody>
       </p:sp>
       <p:sp>
         <p:nvSpPr>
@@ -4682,6 +4842,10 @@
           </a:solidFill>
           <a:ln/>
         </p:spPr>
+        <p:txBody>
+          <a:bodyPr/>
+          <a:p/>
+        </p:txBody>
       </p:sp>
       <p:sp>
         <p:nvSpPr>
@@ -4776,6 +4940,10 @@
           </a:solidFill>
           <a:ln/>
         </p:spPr>
+        <p:txBody>
+          <a:bodyPr/>
+          <a:p/>
+        </p:txBody>
       </p:sp>
       <p:sp>
         <p:nvSpPr>
@@ -4870,6 +5038,10 @@
           </a:solidFill>
           <a:ln/>
         </p:spPr>
+        <p:txBody>
+          <a:bodyPr/>
+          <a:p/>
+        </p:txBody>
       </p:sp>
       <p:sp>
         <p:nvSpPr>
@@ -4964,6 +5136,10 @@
           </a:solidFill>
           <a:ln/>
         </p:spPr>
+        <p:txBody>
+          <a:bodyPr/>
+          <a:p/>
+        </p:txBody>
       </p:sp>
       <p:sp>
         <p:nvSpPr>
@@ -5058,6 +5234,10 @@
           </a:solidFill>
           <a:ln/>
         </p:spPr>
+        <p:txBody>
+          <a:bodyPr/>
+          <a:p/>
+        </p:txBody>
       </p:sp>
       <p:sp>
         <p:nvSpPr>
@@ -5172,6 +5352,10 @@
           </a:solidFill>
           <a:ln/>
         </p:spPr>
+        <p:txBody>
+          <a:bodyPr/>
+          <a:p/>
+        </p:txBody>
       </p:sp>
       <p:sp>
         <p:nvSpPr>
@@ -5337,6 +5521,30 @@
           </a:p>
         </p:txBody>
       </p:sp>
+      <p:pic>
+        <p:nvPicPr>
+          <p:cNvPr id="28" name="Picture 27" descr="image.png"/>
+          <p:cNvPicPr>
+            <a:picLocks noChangeAspect="1"/>
+          </p:cNvPicPr>
+          <p:nvPr/>
+        </p:nvPicPr>
+        <p:blipFill>
+          <a:blip r:embed="rId3"/>
+          <a:stretch>
+            <a:fillRect/>
+          </a:stretch>
+        </p:blipFill>
+        <p:spPr>
+          <a:xfrm>
+            <a:off x="6885432" y="1371600"/>
+            <a:ext cx="5029200" cy="3108960"/>
+          </a:xfrm>
+          <a:prstGeom prst="rect">
+            <a:avLst/>
+          </a:prstGeom>
+        </p:spPr>
+      </p:pic>
     </p:spTree>
   </p:cSld>
   <p:clrMapOvr>
@@ -5589,9 +5797,81 @@
           </a:p>
         </p:txBody>
       </p:sp>
+      <p:sp>
+        <p:nvSpPr>
+          <p:cNvPr id="8" name="Text 5"/>
+          <p:cNvSpPr/>
+          <p:nvPr/>
+        </p:nvSpPr>
+        <p:spPr>
+          <a:xfrm>
+            <a:off x="457200" y="6400800"/>
+            <a:ext cx="3657600" cy="274320"/>
+          </a:xfrm>
+          <a:prstGeom prst="rect">
+            <a:avLst/>
+          </a:prstGeom>
+          <a:noFill/>
+          <a:ln/>
+        </p:spPr>
+        <p:txBody>
+          <a:bodyPr wrap="square" rtlCol="0" anchor="ctr"/>
+          <a:lstStyle/>
+          <a:p>
+            <a:pPr indent="0" marL="0">
+              <a:buNone/>
+            </a:pPr>
+            <a:r>
+              <a:rPr lang="en-US" sz="800" dirty="0">
+                <a:solidFill>
+                  <a:srgbClr val="8B8FA3"/>
+                </a:solidFill>
+              </a:rPr>
+              <a:t>© 2024–2026 Datacendia, LLC</a:t>
+            </a:r>
+            <a:endParaRPr lang="en-US" sz="800" dirty="0"/>
+          </a:p>
+        </p:txBody>
+      </p:sp>
+      <p:sp>
+        <p:nvSpPr>
+          <p:cNvPr id="9" name="Text 6"/>
+          <p:cNvSpPr/>
+          <p:nvPr/>
+        </p:nvSpPr>
+        <p:spPr>
+          <a:xfrm>
+            <a:off x="8229600" y="6400800"/>
+            <a:ext cx="3657600" cy="274320"/>
+          </a:xfrm>
+          <a:prstGeom prst="rect">
+            <a:avLst/>
+          </a:prstGeom>
+          <a:noFill/>
+          <a:ln/>
+        </p:spPr>
+        <p:txBody>
+          <a:bodyPr wrap="square" rtlCol="0" anchor="ctr"/>
+          <a:lstStyle/>
+          <a:p>
+            <a:pPr algn="r" indent="0" marL="0">
+              <a:buNone/>
+            </a:pPr>
+            <a:r>
+              <a:rPr lang="en-US" sz="800" dirty="0">
+                <a:solidFill>
+                  <a:srgbClr val="8B8FA3"/>
+                </a:solidFill>
+              </a:rPr>
+              <a:t>datacendia.com</a:t>
+            </a:r>
+            <a:endParaRPr lang="en-US" sz="800" dirty="0"/>
+          </a:p>
+        </p:txBody>
+      </p:sp>
       <p:pic>
         <p:nvPicPr>
-          <p:cNvPr id="7" name="Image 0" descr="preencoded.png">    </p:cNvPr>
+          <p:cNvPr id="10" name="Picture 9" descr="image.png"/>
           <p:cNvPicPr>
             <a:picLocks noChangeAspect="1"/>
           </p:cNvPicPr>
@@ -5605,86 +5885,14 @@
         </p:blipFill>
         <p:spPr>
           <a:xfrm>
-            <a:off x="5303520" y="1097280"/>
-            <a:ext cx="6400800" cy="4846320"/>
+            <a:off x="6885432" y="1371600"/>
+            <a:ext cx="5029200" cy="3108960"/>
           </a:xfrm>
           <a:prstGeom prst="rect">
             <a:avLst/>
           </a:prstGeom>
         </p:spPr>
       </p:pic>
-      <p:sp>
-        <p:nvSpPr>
-          <p:cNvPr id="8" name="Text 5"/>
-          <p:cNvSpPr/>
-          <p:nvPr/>
-        </p:nvSpPr>
-        <p:spPr>
-          <a:xfrm>
-            <a:off x="457200" y="6400800"/>
-            <a:ext cx="3657600" cy="274320"/>
-          </a:xfrm>
-          <a:prstGeom prst="rect">
-            <a:avLst/>
-          </a:prstGeom>
-          <a:noFill/>
-          <a:ln/>
-        </p:spPr>
-        <p:txBody>
-          <a:bodyPr wrap="square" rtlCol="0" anchor="ctr"/>
-          <a:lstStyle/>
-          <a:p>
-            <a:pPr indent="0" marL="0">
-              <a:buNone/>
-            </a:pPr>
-            <a:r>
-              <a:rPr lang="en-US" sz="800" dirty="0">
-                <a:solidFill>
-                  <a:srgbClr val="8B8FA3"/>
-                </a:solidFill>
-              </a:rPr>
-              <a:t>© 2024–2026 Datacendia, LLC</a:t>
-            </a:r>
-            <a:endParaRPr lang="en-US" sz="800" dirty="0"/>
-          </a:p>
-        </p:txBody>
-      </p:sp>
-      <p:sp>
-        <p:nvSpPr>
-          <p:cNvPr id="9" name="Text 6"/>
-          <p:cNvSpPr/>
-          <p:nvPr/>
-        </p:nvSpPr>
-        <p:spPr>
-          <a:xfrm>
-            <a:off x="8229600" y="6400800"/>
-            <a:ext cx="3657600" cy="274320"/>
-          </a:xfrm>
-          <a:prstGeom prst="rect">
-            <a:avLst/>
-          </a:prstGeom>
-          <a:noFill/>
-          <a:ln/>
-        </p:spPr>
-        <p:txBody>
-          <a:bodyPr wrap="square" rtlCol="0" anchor="ctr"/>
-          <a:lstStyle/>
-          <a:p>
-            <a:pPr algn="r" indent="0" marL="0">
-              <a:buNone/>
-            </a:pPr>
-            <a:r>
-              <a:rPr lang="en-US" sz="800" dirty="0">
-                <a:solidFill>
-                  <a:srgbClr val="8B8FA3"/>
-                </a:solidFill>
-              </a:rPr>
-              <a:t>datacendia.com</a:t>
-            </a:r>
-            <a:endParaRPr lang="en-US" sz="800" dirty="0"/>
-          </a:p>
-        </p:txBody>
-      </p:sp>
     </p:spTree>
   </p:cSld>
   <p:clrMapOvr>
@@ -5937,9 +6145,81 @@
           </a:p>
         </p:txBody>
       </p:sp>
+      <p:sp>
+        <p:nvSpPr>
+          <p:cNvPr id="8" name="Text 5"/>
+          <p:cNvSpPr/>
+          <p:nvPr/>
+        </p:nvSpPr>
+        <p:spPr>
+          <a:xfrm>
+            <a:off x="457200" y="6400800"/>
+            <a:ext cx="3657600" cy="274320"/>
+          </a:xfrm>
+          <a:prstGeom prst="rect">
+            <a:avLst/>
+          </a:prstGeom>
+          <a:noFill/>
+          <a:ln/>
+        </p:spPr>
+        <p:txBody>
+          <a:bodyPr wrap="square" rtlCol="0" anchor="ctr"/>
+          <a:lstStyle/>
+          <a:p>
+            <a:pPr indent="0" marL="0">
+              <a:buNone/>
+            </a:pPr>
+            <a:r>
+              <a:rPr lang="en-US" sz="800" dirty="0">
+                <a:solidFill>
+                  <a:srgbClr val="8B8FA3"/>
+                </a:solidFill>
+              </a:rPr>
+              <a:t>© 2024–2026 Datacendia, LLC</a:t>
+            </a:r>
+            <a:endParaRPr lang="en-US" sz="800" dirty="0"/>
+          </a:p>
+        </p:txBody>
+      </p:sp>
+      <p:sp>
+        <p:nvSpPr>
+          <p:cNvPr id="9" name="Text 6"/>
+          <p:cNvSpPr/>
+          <p:nvPr/>
+        </p:nvSpPr>
+        <p:spPr>
+          <a:xfrm>
+            <a:off x="8229600" y="6400800"/>
+            <a:ext cx="3657600" cy="274320"/>
+          </a:xfrm>
+          <a:prstGeom prst="rect">
+            <a:avLst/>
+          </a:prstGeom>
+          <a:noFill/>
+          <a:ln/>
+        </p:spPr>
+        <p:txBody>
+          <a:bodyPr wrap="square" rtlCol="0" anchor="ctr"/>
+          <a:lstStyle/>
+          <a:p>
+            <a:pPr algn="r" indent="0" marL="0">
+              <a:buNone/>
+            </a:pPr>
+            <a:r>
+              <a:rPr lang="en-US" sz="800" dirty="0">
+                <a:solidFill>
+                  <a:srgbClr val="8B8FA3"/>
+                </a:solidFill>
+              </a:rPr>
+              <a:t>datacendia.com</a:t>
+            </a:r>
+            <a:endParaRPr lang="en-US" sz="800" dirty="0"/>
+          </a:p>
+        </p:txBody>
+      </p:sp>
       <p:pic>
         <p:nvPicPr>
-          <p:cNvPr id="7" name="Image 0" descr="preencoded.png">    </p:cNvPr>
+          <p:cNvPr id="10" name="Picture 9" descr="image.png"/>
           <p:cNvPicPr>
             <a:picLocks noChangeAspect="1"/>
           </p:cNvPicPr>
@@ -5953,86 +6233,14 @@
         </p:blipFill>
         <p:spPr>
           <a:xfrm>
-            <a:off x="5303520" y="1097280"/>
-            <a:ext cx="6400800" cy="4846320"/>
+            <a:off x="6885432" y="1371600"/>
+            <a:ext cx="5029200" cy="3108960"/>
           </a:xfrm>
           <a:prstGeom prst="rect">
             <a:avLst/>
           </a:prstGeom>
         </p:spPr>
       </p:pic>
-      <p:sp>
-        <p:nvSpPr>
-          <p:cNvPr id="8" name="Text 5"/>
-          <p:cNvSpPr/>
-          <p:nvPr/>
-        </p:nvSpPr>
-        <p:spPr>
-          <a:xfrm>
-            <a:off x="457200" y="6400800"/>
-            <a:ext cx="3657600" cy="274320"/>
-          </a:xfrm>
-          <a:prstGeom prst="rect">
-            <a:avLst/>
-          </a:prstGeom>
-          <a:noFill/>
-          <a:ln/>
-        </p:spPr>
-        <p:txBody>
-          <a:bodyPr wrap="square" rtlCol="0" anchor="ctr"/>
-          <a:lstStyle/>
-          <a:p>
-            <a:pPr indent="0" marL="0">
-              <a:buNone/>
-            </a:pPr>
-            <a:r>
-              <a:rPr lang="en-US" sz="800" dirty="0">
-                <a:solidFill>
-                  <a:srgbClr val="8B8FA3"/>
-                </a:solidFill>
-              </a:rPr>
-              <a:t>© 2024–2026 Datacendia, LLC</a:t>
-            </a:r>
-            <a:endParaRPr lang="en-US" sz="800" dirty="0"/>
-          </a:p>
-        </p:txBody>
-      </p:sp>
-      <p:sp>
-        <p:nvSpPr>
-          <p:cNvPr id="9" name="Text 6"/>
-          <p:cNvSpPr/>
-          <p:nvPr/>
-        </p:nvSpPr>
-        <p:spPr>
-          <a:xfrm>
-            <a:off x="8229600" y="6400800"/>
-            <a:ext cx="3657600" cy="274320"/>
-          </a:xfrm>
-          <a:prstGeom prst="rect">
-            <a:avLst/>
-          </a:prstGeom>
-          <a:noFill/>
-          <a:ln/>
-        </p:spPr>
-        <p:txBody>
-          <a:bodyPr wrap="square" rtlCol="0" anchor="ctr"/>
-          <a:lstStyle/>
-          <a:p>
-            <a:pPr algn="r" indent="0" marL="0">
-              <a:buNone/>
-            </a:pPr>
-            <a:r>
-              <a:rPr lang="en-US" sz="800" dirty="0">
-                <a:solidFill>
-                  <a:srgbClr val="8B8FA3"/>
-                </a:solidFill>
-              </a:rPr>
-              <a:t>datacendia.com</a:t>
-            </a:r>
-            <a:endParaRPr lang="en-US" sz="800" dirty="0"/>
-          </a:p>
-        </p:txBody>
-      </p:sp>
     </p:spTree>
   </p:cSld>
   <p:clrMapOvr>
@@ -6306,6 +6514,10 @@
           </a:solidFill>
           <a:ln/>
         </p:spPr>
+        <p:txBody>
+          <a:bodyPr/>
+          <a:p/>
+        </p:txBody>
       </p:sp>
       <p:sp>
         <p:nvSpPr>
@@ -6615,6 +6827,10 @@
           </a:solidFill>
           <a:ln/>
         </p:spPr>
+        <p:txBody>
+          <a:bodyPr/>
+          <a:p/>
+        </p:txBody>
       </p:sp>
       <p:sp>
         <p:nvSpPr>
@@ -6712,6 +6928,10 @@
           </a:solidFill>
           <a:ln/>
         </p:spPr>
+        <p:txBody>
+          <a:bodyPr/>
+          <a:p/>
+        </p:txBody>
       </p:sp>
       <p:sp>
         <p:nvSpPr>
@@ -6809,6 +7029,10 @@
           </a:solidFill>
           <a:ln/>
         </p:spPr>
+        <p:txBody>
+          <a:bodyPr/>
+          <a:p/>
+        </p:txBody>
       </p:sp>
       <p:sp>
         <p:nvSpPr>

--- a/docs/pitch-decks/investor-100/pptx/090-sands-capital.pptx
+++ b/docs/pitch-decks/investor-100/pptx/090-sands-capital.pptx
@@ -1769,10 +1769,6 @@
           </a:solidFill>
           <a:ln/>
         </p:spPr>
-        <p:txBody>
-          <a:bodyPr/>
-          <a:p/>
-        </p:txBody>
       </p:sp>
       <p:sp>
         <p:nvSpPr>
@@ -1940,10 +1936,6 @@
             <a:prstDash val="solid"/>
           </a:ln>
         </p:spPr>
-        <p:txBody>
-          <a:bodyPr/>
-          <a:p/>
-        </p:txBody>
       </p:sp>
       <p:sp>
         <p:nvSpPr>
@@ -2053,30 +2045,6 @@
           </a:p>
         </p:txBody>
       </p:sp>
-      <p:pic>
-        <p:nvPicPr>
-          <p:cNvPr id="13" name="Picture 12" descr="04-dcii-dashboard.png"/>
-          <p:cNvPicPr>
-            <a:picLocks noChangeAspect="1"/>
-          </p:cNvPicPr>
-          <p:nvPr/>
-        </p:nvPicPr>
-        <p:blipFill>
-          <a:blip r:embed="rId3"/>
-          <a:stretch>
-            <a:fillRect/>
-          </a:stretch>
-        </p:blipFill>
-        <p:spPr>
-          <a:xfrm>
-            <a:off x="6885432" y="1371600"/>
-            <a:ext cx="5029200" cy="3108960"/>
-          </a:xfrm>
-          <a:prstGeom prst="rect">
-            <a:avLst/>
-          </a:prstGeom>
-        </p:spPr>
-      </p:pic>
     </p:spTree>
   </p:cSld>
   <p:clrMapOvr>
@@ -2274,10 +2242,6 @@
           </a:solidFill>
           <a:ln/>
         </p:spPr>
-        <p:txBody>
-          <a:bodyPr/>
-          <a:p/>
-        </p:txBody>
       </p:sp>
       <p:sp>
         <p:nvSpPr>
@@ -2336,10 +2300,6 @@
           </a:solidFill>
           <a:ln/>
         </p:spPr>
-        <p:txBody>
-          <a:bodyPr/>
-          <a:p/>
-        </p:txBody>
       </p:sp>
       <p:sp>
         <p:nvSpPr>
@@ -2398,10 +2358,6 @@
           </a:solidFill>
           <a:ln/>
         </p:spPr>
-        <p:txBody>
-          <a:bodyPr/>
-          <a:p/>
-        </p:txBody>
       </p:sp>
       <p:sp>
         <p:nvSpPr>
@@ -2460,10 +2416,6 @@
           </a:solidFill>
           <a:ln/>
         </p:spPr>
-        <p:txBody>
-          <a:bodyPr/>
-          <a:p/>
-        </p:txBody>
       </p:sp>
       <p:sp>
         <p:nvSpPr>
@@ -2845,10 +2797,6 @@
           </a:solidFill>
           <a:ln/>
         </p:spPr>
-        <p:txBody>
-          <a:bodyPr/>
-          <a:p/>
-        </p:txBody>
       </p:sp>
       <p:sp>
         <p:nvSpPr>
@@ -2946,10 +2894,6 @@
           </a:solidFill>
           <a:ln/>
         </p:spPr>
-        <p:txBody>
-          <a:bodyPr/>
-          <a:p/>
-        </p:txBody>
       </p:sp>
       <p:sp>
         <p:nvSpPr>
@@ -3192,30 +3136,6 @@
           </a:p>
         </p:txBody>
       </p:sp>
-      <p:pic>
-        <p:nvPicPr>
-          <p:cNvPr id="16" name="Picture 15" descr="07-graph-explorer.png"/>
-          <p:cNvPicPr>
-            <a:picLocks noChangeAspect="1"/>
-          </p:cNvPicPr>
-          <p:nvPr/>
-        </p:nvPicPr>
-        <p:blipFill>
-          <a:blip r:embed="rId3"/>
-          <a:stretch>
-            <a:fillRect/>
-          </a:stretch>
-        </p:blipFill>
-        <p:spPr>
-          <a:xfrm>
-            <a:off x="6885432" y="1371600"/>
-            <a:ext cx="5029200" cy="3108960"/>
-          </a:xfrm>
-          <a:prstGeom prst="rect">
-            <a:avLst/>
-          </a:prstGeom>
-        </p:spPr>
-      </p:pic>
     </p:spTree>
   </p:cSld>
   <p:clrMapOvr>
@@ -3489,10 +3409,6 @@
           </a:solidFill>
           <a:ln/>
         </p:spPr>
-        <p:txBody>
-          <a:bodyPr/>
-          <a:p/>
-        </p:txBody>
       </p:sp>
       <p:sp>
         <p:nvSpPr>
@@ -3587,10 +3503,6 @@
           </a:solidFill>
           <a:ln/>
         </p:spPr>
-        <p:txBody>
-          <a:bodyPr/>
-          <a:p/>
-        </p:txBody>
       </p:sp>
       <p:sp>
         <p:nvSpPr>
@@ -3685,10 +3597,6 @@
           </a:solidFill>
           <a:ln/>
         </p:spPr>
-        <p:txBody>
-          <a:bodyPr/>
-          <a:p/>
-        </p:txBody>
       </p:sp>
       <p:sp>
         <p:nvSpPr>
@@ -3783,10 +3691,6 @@
           </a:solidFill>
           <a:ln/>
         </p:spPr>
-        <p:txBody>
-          <a:bodyPr/>
-          <a:p/>
-        </p:txBody>
       </p:sp>
       <p:sp>
         <p:nvSpPr>
@@ -3932,30 +3836,6 @@
           </a:p>
         </p:txBody>
       </p:sp>
-      <p:pic>
-        <p:nvPicPr>
-          <p:cNvPr id="20" name="Picture 19" descr="image.png"/>
-          <p:cNvPicPr>
-            <a:picLocks noChangeAspect="1"/>
-          </p:cNvPicPr>
-          <p:nvPr/>
-        </p:nvPicPr>
-        <p:blipFill>
-          <a:blip r:embed="rId3"/>
-          <a:stretch>
-            <a:fillRect/>
-          </a:stretch>
-        </p:blipFill>
-        <p:spPr>
-          <a:xfrm>
-            <a:off x="6885432" y="1371600"/>
-            <a:ext cx="5029200" cy="3108960"/>
-          </a:xfrm>
-          <a:prstGeom prst="rect">
-            <a:avLst/>
-          </a:prstGeom>
-        </p:spPr>
-      </p:pic>
     </p:spTree>
   </p:cSld>
   <p:clrMapOvr>
@@ -4247,10 +4127,6 @@
           </a:solidFill>
           <a:ln/>
         </p:spPr>
-        <p:txBody>
-          <a:bodyPr/>
-          <a:p/>
-        </p:txBody>
       </p:sp>
       <p:sp>
         <p:nvSpPr>
@@ -4345,10 +4221,6 @@
           </a:solidFill>
           <a:ln/>
         </p:spPr>
-        <p:txBody>
-          <a:bodyPr/>
-          <a:p/>
-        </p:txBody>
       </p:sp>
       <p:sp>
         <p:nvSpPr>
@@ -4407,10 +4279,6 @@
           </a:solidFill>
           <a:ln/>
         </p:spPr>
-        <p:txBody>
-          <a:bodyPr/>
-          <a:p/>
-        </p:txBody>
       </p:sp>
       <p:sp>
         <p:nvSpPr>
@@ -4559,30 +4427,6 @@
           </a:p>
         </p:txBody>
       </p:sp>
-      <p:pic>
-        <p:nvPicPr>
-          <p:cNvPr id="16" name="Picture 15" descr="image.png"/>
-          <p:cNvPicPr>
-            <a:picLocks noChangeAspect="1"/>
-          </p:cNvPicPr>
-          <p:nvPr/>
-        </p:nvPicPr>
-        <p:blipFill>
-          <a:blip r:embed="rId3"/>
-          <a:stretch>
-            <a:fillRect/>
-          </a:stretch>
-        </p:blipFill>
-        <p:spPr>
-          <a:xfrm>
-            <a:off x="6885432" y="1371600"/>
-            <a:ext cx="5029200" cy="3108960"/>
-          </a:xfrm>
-          <a:prstGeom prst="rect">
-            <a:avLst/>
-          </a:prstGeom>
-        </p:spPr>
-      </p:pic>
     </p:spTree>
   </p:cSld>
   <p:clrMapOvr>
@@ -4744,10 +4588,6 @@
           </a:solidFill>
           <a:ln/>
         </p:spPr>
-        <p:txBody>
-          <a:bodyPr/>
-          <a:p/>
-        </p:txBody>
       </p:sp>
       <p:sp>
         <p:nvSpPr>
@@ -4842,10 +4682,6 @@
           </a:solidFill>
           <a:ln/>
         </p:spPr>
-        <p:txBody>
-          <a:bodyPr/>
-          <a:p/>
-        </p:txBody>
       </p:sp>
       <p:sp>
         <p:nvSpPr>
@@ -4940,10 +4776,6 @@
           </a:solidFill>
           <a:ln/>
         </p:spPr>
-        <p:txBody>
-          <a:bodyPr/>
-          <a:p/>
-        </p:txBody>
       </p:sp>
       <p:sp>
         <p:nvSpPr>
@@ -5038,10 +4870,6 @@
           </a:solidFill>
           <a:ln/>
         </p:spPr>
-        <p:txBody>
-          <a:bodyPr/>
-          <a:p/>
-        </p:txBody>
       </p:sp>
       <p:sp>
         <p:nvSpPr>
@@ -5136,10 +4964,6 @@
           </a:solidFill>
           <a:ln/>
         </p:spPr>
-        <p:txBody>
-          <a:bodyPr/>
-          <a:p/>
-        </p:txBody>
       </p:sp>
       <p:sp>
         <p:nvSpPr>
@@ -5234,10 +5058,6 @@
           </a:solidFill>
           <a:ln/>
         </p:spPr>
-        <p:txBody>
-          <a:bodyPr/>
-          <a:p/>
-        </p:txBody>
       </p:sp>
       <p:sp>
         <p:nvSpPr>
@@ -5352,10 +5172,6 @@
           </a:solidFill>
           <a:ln/>
         </p:spPr>
-        <p:txBody>
-          <a:bodyPr/>
-          <a:p/>
-        </p:txBody>
       </p:sp>
       <p:sp>
         <p:nvSpPr>
@@ -5521,30 +5337,6 @@
           </a:p>
         </p:txBody>
       </p:sp>
-      <p:pic>
-        <p:nvPicPr>
-          <p:cNvPr id="28" name="Picture 27" descr="image.png"/>
-          <p:cNvPicPr>
-            <a:picLocks noChangeAspect="1"/>
-          </p:cNvPicPr>
-          <p:nvPr/>
-        </p:nvPicPr>
-        <p:blipFill>
-          <a:blip r:embed="rId3"/>
-          <a:stretch>
-            <a:fillRect/>
-          </a:stretch>
-        </p:blipFill>
-        <p:spPr>
-          <a:xfrm>
-            <a:off x="6885432" y="1371600"/>
-            <a:ext cx="5029200" cy="3108960"/>
-          </a:xfrm>
-          <a:prstGeom prst="rect">
-            <a:avLst/>
-          </a:prstGeom>
-        </p:spPr>
-      </p:pic>
     </p:spTree>
   </p:cSld>
   <p:clrMapOvr>
@@ -5797,81 +5589,9 @@
           </a:p>
         </p:txBody>
       </p:sp>
-      <p:sp>
-        <p:nvSpPr>
-          <p:cNvPr id="8" name="Text 5"/>
-          <p:cNvSpPr/>
-          <p:nvPr/>
-        </p:nvSpPr>
-        <p:spPr>
-          <a:xfrm>
-            <a:off x="457200" y="6400800"/>
-            <a:ext cx="3657600" cy="274320"/>
-          </a:xfrm>
-          <a:prstGeom prst="rect">
-            <a:avLst/>
-          </a:prstGeom>
-          <a:noFill/>
-          <a:ln/>
-        </p:spPr>
-        <p:txBody>
-          <a:bodyPr wrap="square" rtlCol="0" anchor="ctr"/>
-          <a:lstStyle/>
-          <a:p>
-            <a:pPr indent="0" marL="0">
-              <a:buNone/>
-            </a:pPr>
-            <a:r>
-              <a:rPr lang="en-US" sz="800" dirty="0">
-                <a:solidFill>
-                  <a:srgbClr val="8B8FA3"/>
-                </a:solidFill>
-              </a:rPr>
-              <a:t>© 2024–2026 Datacendia, LLC</a:t>
-            </a:r>
-            <a:endParaRPr lang="en-US" sz="800" dirty="0"/>
-          </a:p>
-        </p:txBody>
-      </p:sp>
-      <p:sp>
-        <p:nvSpPr>
-          <p:cNvPr id="9" name="Text 6"/>
-          <p:cNvSpPr/>
-          <p:nvPr/>
-        </p:nvSpPr>
-        <p:spPr>
-          <a:xfrm>
-            <a:off x="8229600" y="6400800"/>
-            <a:ext cx="3657600" cy="274320"/>
-          </a:xfrm>
-          <a:prstGeom prst="rect">
-            <a:avLst/>
-          </a:prstGeom>
-          <a:noFill/>
-          <a:ln/>
-        </p:spPr>
-        <p:txBody>
-          <a:bodyPr wrap="square" rtlCol="0" anchor="ctr"/>
-          <a:lstStyle/>
-          <a:p>
-            <a:pPr algn="r" indent="0" marL="0">
-              <a:buNone/>
-            </a:pPr>
-            <a:r>
-              <a:rPr lang="en-US" sz="800" dirty="0">
-                <a:solidFill>
-                  <a:srgbClr val="8B8FA3"/>
-                </a:solidFill>
-              </a:rPr>
-              <a:t>datacendia.com</a:t>
-            </a:r>
-            <a:endParaRPr lang="en-US" sz="800" dirty="0"/>
-          </a:p>
-        </p:txBody>
-      </p:sp>
       <p:pic>
         <p:nvPicPr>
-          <p:cNvPr id="10" name="Picture 9" descr="image.png"/>
+          <p:cNvPr id="7" name="Image 0" descr="preencoded.png">    </p:cNvPr>
           <p:cNvPicPr>
             <a:picLocks noChangeAspect="1"/>
           </p:cNvPicPr>
@@ -5885,14 +5605,86 @@
         </p:blipFill>
         <p:spPr>
           <a:xfrm>
-            <a:off x="6885432" y="1371600"/>
-            <a:ext cx="5029200" cy="3108960"/>
+            <a:off x="5303520" y="1097280"/>
+            <a:ext cx="6400800" cy="4846320"/>
           </a:xfrm>
           <a:prstGeom prst="rect">
             <a:avLst/>
           </a:prstGeom>
         </p:spPr>
       </p:pic>
+      <p:sp>
+        <p:nvSpPr>
+          <p:cNvPr id="8" name="Text 5"/>
+          <p:cNvSpPr/>
+          <p:nvPr/>
+        </p:nvSpPr>
+        <p:spPr>
+          <a:xfrm>
+            <a:off x="457200" y="6400800"/>
+            <a:ext cx="3657600" cy="274320"/>
+          </a:xfrm>
+          <a:prstGeom prst="rect">
+            <a:avLst/>
+          </a:prstGeom>
+          <a:noFill/>
+          <a:ln/>
+        </p:spPr>
+        <p:txBody>
+          <a:bodyPr wrap="square" rtlCol="0" anchor="ctr"/>
+          <a:lstStyle/>
+          <a:p>
+            <a:pPr indent="0" marL="0">
+              <a:buNone/>
+            </a:pPr>
+            <a:r>
+              <a:rPr lang="en-US" sz="800" dirty="0">
+                <a:solidFill>
+                  <a:srgbClr val="8B8FA3"/>
+                </a:solidFill>
+              </a:rPr>
+              <a:t>© 2024–2026 Datacendia, LLC</a:t>
+            </a:r>
+            <a:endParaRPr lang="en-US" sz="800" dirty="0"/>
+          </a:p>
+        </p:txBody>
+      </p:sp>
+      <p:sp>
+        <p:nvSpPr>
+          <p:cNvPr id="9" name="Text 6"/>
+          <p:cNvSpPr/>
+          <p:nvPr/>
+        </p:nvSpPr>
+        <p:spPr>
+          <a:xfrm>
+            <a:off x="8229600" y="6400800"/>
+            <a:ext cx="3657600" cy="274320"/>
+          </a:xfrm>
+          <a:prstGeom prst="rect">
+            <a:avLst/>
+          </a:prstGeom>
+          <a:noFill/>
+          <a:ln/>
+        </p:spPr>
+        <p:txBody>
+          <a:bodyPr wrap="square" rtlCol="0" anchor="ctr"/>
+          <a:lstStyle/>
+          <a:p>
+            <a:pPr algn="r" indent="0" marL="0">
+              <a:buNone/>
+            </a:pPr>
+            <a:r>
+              <a:rPr lang="en-US" sz="800" dirty="0">
+                <a:solidFill>
+                  <a:srgbClr val="8B8FA3"/>
+                </a:solidFill>
+              </a:rPr>
+              <a:t>datacendia.com</a:t>
+            </a:r>
+            <a:endParaRPr lang="en-US" sz="800" dirty="0"/>
+          </a:p>
+        </p:txBody>
+      </p:sp>
     </p:spTree>
   </p:cSld>
   <p:clrMapOvr>
@@ -6145,81 +5937,9 @@
           </a:p>
         </p:txBody>
       </p:sp>
-      <p:sp>
-        <p:nvSpPr>
-          <p:cNvPr id="8" name="Text 5"/>
-          <p:cNvSpPr/>
-          <p:nvPr/>
-        </p:nvSpPr>
-        <p:spPr>
-          <a:xfrm>
-            <a:off x="457200" y="6400800"/>
-            <a:ext cx="3657600" cy="274320"/>
-          </a:xfrm>
-          <a:prstGeom prst="rect">
-            <a:avLst/>
-          </a:prstGeom>
-          <a:noFill/>
-          <a:ln/>
-        </p:spPr>
-        <p:txBody>
-          <a:bodyPr wrap="square" rtlCol="0" anchor="ctr"/>
-          <a:lstStyle/>
-          <a:p>
-            <a:pPr indent="0" marL="0">
-              <a:buNone/>
-            </a:pPr>
-            <a:r>
-              <a:rPr lang="en-US" sz="800" dirty="0">
-                <a:solidFill>
-                  <a:srgbClr val="8B8FA3"/>
-                </a:solidFill>
-              </a:rPr>
-              <a:t>© 2024–2026 Datacendia, LLC</a:t>
-            </a:r>
-            <a:endParaRPr lang="en-US" sz="800" dirty="0"/>
-          </a:p>
-        </p:txBody>
-      </p:sp>
-      <p:sp>
-        <p:nvSpPr>
-          <p:cNvPr id="9" name="Text 6"/>
-          <p:cNvSpPr/>
-          <p:nvPr/>
-        </p:nvSpPr>
-        <p:spPr>
-          <a:xfrm>
-            <a:off x="8229600" y="6400800"/>
-            <a:ext cx="3657600" cy="274320"/>
-          </a:xfrm>
-          <a:prstGeom prst="rect">
-            <a:avLst/>
-          </a:prstGeom>
-          <a:noFill/>
-          <a:ln/>
-        </p:spPr>
-        <p:txBody>
-          <a:bodyPr wrap="square" rtlCol="0" anchor="ctr"/>
-          <a:lstStyle/>
-          <a:p>
-            <a:pPr algn="r" indent="0" marL="0">
-              <a:buNone/>
-            </a:pPr>
-            <a:r>
-              <a:rPr lang="en-US" sz="800" dirty="0">
-                <a:solidFill>
-                  <a:srgbClr val="8B8FA3"/>
-                </a:solidFill>
-              </a:rPr>
-              <a:t>datacendia.com</a:t>
-            </a:r>
-            <a:endParaRPr lang="en-US" sz="800" dirty="0"/>
-          </a:p>
-        </p:txBody>
-      </p:sp>
       <p:pic>
         <p:nvPicPr>
-          <p:cNvPr id="10" name="Picture 9" descr="image.png"/>
+          <p:cNvPr id="7" name="Image 0" descr="preencoded.png">    </p:cNvPr>
           <p:cNvPicPr>
             <a:picLocks noChangeAspect="1"/>
           </p:cNvPicPr>
@@ -6233,14 +5953,86 @@
         </p:blipFill>
         <p:spPr>
           <a:xfrm>
-            <a:off x="6885432" y="1371600"/>
-            <a:ext cx="5029200" cy="3108960"/>
+            <a:off x="5303520" y="1097280"/>
+            <a:ext cx="6400800" cy="4846320"/>
           </a:xfrm>
           <a:prstGeom prst="rect">
             <a:avLst/>
           </a:prstGeom>
         </p:spPr>
       </p:pic>
+      <p:sp>
+        <p:nvSpPr>
+          <p:cNvPr id="8" name="Text 5"/>
+          <p:cNvSpPr/>
+          <p:nvPr/>
+        </p:nvSpPr>
+        <p:spPr>
+          <a:xfrm>
+            <a:off x="457200" y="6400800"/>
+            <a:ext cx="3657600" cy="274320"/>
+          </a:xfrm>
+          <a:prstGeom prst="rect">
+            <a:avLst/>
+          </a:prstGeom>
+          <a:noFill/>
+          <a:ln/>
+        </p:spPr>
+        <p:txBody>
+          <a:bodyPr wrap="square" rtlCol="0" anchor="ctr"/>
+          <a:lstStyle/>
+          <a:p>
+            <a:pPr indent="0" marL="0">
+              <a:buNone/>
+            </a:pPr>
+            <a:r>
+              <a:rPr lang="en-US" sz="800" dirty="0">
+                <a:solidFill>
+                  <a:srgbClr val="8B8FA3"/>
+                </a:solidFill>
+              </a:rPr>
+              <a:t>© 2024–2026 Datacendia, LLC</a:t>
+            </a:r>
+            <a:endParaRPr lang="en-US" sz="800" dirty="0"/>
+          </a:p>
+        </p:txBody>
+      </p:sp>
+      <p:sp>
+        <p:nvSpPr>
+          <p:cNvPr id="9" name="Text 6"/>
+          <p:cNvSpPr/>
+          <p:nvPr/>
+        </p:nvSpPr>
+        <p:spPr>
+          <a:xfrm>
+            <a:off x="8229600" y="6400800"/>
+            <a:ext cx="3657600" cy="274320"/>
+          </a:xfrm>
+          <a:prstGeom prst="rect">
+            <a:avLst/>
+          </a:prstGeom>
+          <a:noFill/>
+          <a:ln/>
+        </p:spPr>
+        <p:txBody>
+          <a:bodyPr wrap="square" rtlCol="0" anchor="ctr"/>
+          <a:lstStyle/>
+          <a:p>
+            <a:pPr algn="r" indent="0" marL="0">
+              <a:buNone/>
+            </a:pPr>
+            <a:r>
+              <a:rPr lang="en-US" sz="800" dirty="0">
+                <a:solidFill>
+                  <a:srgbClr val="8B8FA3"/>
+                </a:solidFill>
+              </a:rPr>
+              <a:t>datacendia.com</a:t>
+            </a:r>
+            <a:endParaRPr lang="en-US" sz="800" dirty="0"/>
+          </a:p>
+        </p:txBody>
+      </p:sp>
     </p:spTree>
   </p:cSld>
   <p:clrMapOvr>
@@ -6514,10 +6306,6 @@
           </a:solidFill>
           <a:ln/>
         </p:spPr>
-        <p:txBody>
-          <a:bodyPr/>
-          <a:p/>
-        </p:txBody>
       </p:sp>
       <p:sp>
         <p:nvSpPr>
@@ -6827,10 +6615,6 @@
           </a:solidFill>
           <a:ln/>
         </p:spPr>
-        <p:txBody>
-          <a:bodyPr/>
-          <a:p/>
-        </p:txBody>
       </p:sp>
       <p:sp>
         <p:nvSpPr>
@@ -6928,10 +6712,6 @@
           </a:solidFill>
           <a:ln/>
         </p:spPr>
-        <p:txBody>
-          <a:bodyPr/>
-          <a:p/>
-        </p:txBody>
       </p:sp>
       <p:sp>
         <p:nvSpPr>
@@ -7029,10 +6809,6 @@
           </a:solidFill>
           <a:ln/>
         </p:spPr>
-        <p:txBody>
-          <a:bodyPr/>
-          <a:p/>
-        </p:txBody>
       </p:sp>
       <p:sp>
         <p:nvSpPr>

--- a/docs/pitch-decks/investor-100/pptx/090-sands-capital.pptx
+++ b/docs/pitch-decks/investor-100/pptx/090-sands-capital.pptx
@@ -5589,9 +5589,81 @@
           </a:p>
         </p:txBody>
       </p:sp>
+      <p:sp>
+        <p:nvSpPr>
+          <p:cNvPr id="8" name="Text 5"/>
+          <p:cNvSpPr/>
+          <p:nvPr/>
+        </p:nvSpPr>
+        <p:spPr>
+          <a:xfrm>
+            <a:off x="457200" y="6400800"/>
+            <a:ext cx="3657600" cy="274320"/>
+          </a:xfrm>
+          <a:prstGeom prst="rect">
+            <a:avLst/>
+          </a:prstGeom>
+          <a:noFill/>
+          <a:ln/>
+        </p:spPr>
+        <p:txBody>
+          <a:bodyPr wrap="square" rtlCol="0" anchor="ctr"/>
+          <a:lstStyle/>
+          <a:p>
+            <a:pPr indent="0" marL="0">
+              <a:buNone/>
+            </a:pPr>
+            <a:r>
+              <a:rPr lang="en-US" sz="800" dirty="0">
+                <a:solidFill>
+                  <a:srgbClr val="8B8FA3"/>
+                </a:solidFill>
+              </a:rPr>
+              <a:t>© 2024–2026 Datacendia, LLC</a:t>
+            </a:r>
+            <a:endParaRPr lang="en-US" sz="800" dirty="0"/>
+          </a:p>
+        </p:txBody>
+      </p:sp>
+      <p:sp>
+        <p:nvSpPr>
+          <p:cNvPr id="9" name="Text 6"/>
+          <p:cNvSpPr/>
+          <p:nvPr/>
+        </p:nvSpPr>
+        <p:spPr>
+          <a:xfrm>
+            <a:off x="8229600" y="6400800"/>
+            <a:ext cx="3657600" cy="274320"/>
+          </a:xfrm>
+          <a:prstGeom prst="rect">
+            <a:avLst/>
+          </a:prstGeom>
+          <a:noFill/>
+          <a:ln/>
+        </p:spPr>
+        <p:txBody>
+          <a:bodyPr wrap="square" rtlCol="0" anchor="ctr"/>
+          <a:lstStyle/>
+          <a:p>
+            <a:pPr algn="r" indent="0" marL="0">
+              <a:buNone/>
+            </a:pPr>
+            <a:r>
+              <a:rPr lang="en-US" sz="800" dirty="0">
+                <a:solidFill>
+                  <a:srgbClr val="8B8FA3"/>
+                </a:solidFill>
+              </a:rPr>
+              <a:t>datacendia.com</a:t>
+            </a:r>
+            <a:endParaRPr lang="en-US" sz="800" dirty="0"/>
+          </a:p>
+        </p:txBody>
+      </p:sp>
       <p:pic>
         <p:nvPicPr>
-          <p:cNvPr id="7" name="Image 0" descr="preencoded.png">    </p:cNvPr>
+          <p:cNvPr id="10" name="Picture 9" descr="image.png"/>
           <p:cNvPicPr>
             <a:picLocks noChangeAspect="1"/>
           </p:cNvPicPr>
@@ -5613,78 +5685,6 @@
           </a:prstGeom>
         </p:spPr>
       </p:pic>
-      <p:sp>
-        <p:nvSpPr>
-          <p:cNvPr id="8" name="Text 5"/>
-          <p:cNvSpPr/>
-          <p:nvPr/>
-        </p:nvSpPr>
-        <p:spPr>
-          <a:xfrm>
-            <a:off x="457200" y="6400800"/>
-            <a:ext cx="3657600" cy="274320"/>
-          </a:xfrm>
-          <a:prstGeom prst="rect">
-            <a:avLst/>
-          </a:prstGeom>
-          <a:noFill/>
-          <a:ln/>
-        </p:spPr>
-        <p:txBody>
-          <a:bodyPr wrap="square" rtlCol="0" anchor="ctr"/>
-          <a:lstStyle/>
-          <a:p>
-            <a:pPr indent="0" marL="0">
-              <a:buNone/>
-            </a:pPr>
-            <a:r>
-              <a:rPr lang="en-US" sz="800" dirty="0">
-                <a:solidFill>
-                  <a:srgbClr val="8B8FA3"/>
-                </a:solidFill>
-              </a:rPr>
-              <a:t>© 2024–2026 Datacendia, LLC</a:t>
-            </a:r>
-            <a:endParaRPr lang="en-US" sz="800" dirty="0"/>
-          </a:p>
-        </p:txBody>
-      </p:sp>
-      <p:sp>
-        <p:nvSpPr>
-          <p:cNvPr id="9" name="Text 6"/>
-          <p:cNvSpPr/>
-          <p:nvPr/>
-        </p:nvSpPr>
-        <p:spPr>
-          <a:xfrm>
-            <a:off x="8229600" y="6400800"/>
-            <a:ext cx="3657600" cy="274320"/>
-          </a:xfrm>
-          <a:prstGeom prst="rect">
-            <a:avLst/>
-          </a:prstGeom>
-          <a:noFill/>
-          <a:ln/>
-        </p:spPr>
-        <p:txBody>
-          <a:bodyPr wrap="square" rtlCol="0" anchor="ctr"/>
-          <a:lstStyle/>
-          <a:p>
-            <a:pPr algn="r" indent="0" marL="0">
-              <a:buNone/>
-            </a:pPr>
-            <a:r>
-              <a:rPr lang="en-US" sz="800" dirty="0">
-                <a:solidFill>
-                  <a:srgbClr val="8B8FA3"/>
-                </a:solidFill>
-              </a:rPr>
-              <a:t>datacendia.com</a:t>
-            </a:r>
-            <a:endParaRPr lang="en-US" sz="800" dirty="0"/>
-          </a:p>
-        </p:txBody>
-      </p:sp>
     </p:spTree>
   </p:cSld>
   <p:clrMapOvr>
@@ -5937,9 +5937,81 @@
           </a:p>
         </p:txBody>
       </p:sp>
+      <p:sp>
+        <p:nvSpPr>
+          <p:cNvPr id="8" name="Text 5"/>
+          <p:cNvSpPr/>
+          <p:nvPr/>
+        </p:nvSpPr>
+        <p:spPr>
+          <a:xfrm>
+            <a:off x="457200" y="6400800"/>
+            <a:ext cx="3657600" cy="274320"/>
+          </a:xfrm>
+          <a:prstGeom prst="rect">
+            <a:avLst/>
+          </a:prstGeom>
+          <a:noFill/>
+          <a:ln/>
+        </p:spPr>
+        <p:txBody>
+          <a:bodyPr wrap="square" rtlCol="0" anchor="ctr"/>
+          <a:lstStyle/>
+          <a:p>
+            <a:pPr indent="0" marL="0">
+              <a:buNone/>
+            </a:pPr>
+            <a:r>
+              <a:rPr lang="en-US" sz="800" dirty="0">
+                <a:solidFill>
+                  <a:srgbClr val="8B8FA3"/>
+                </a:solidFill>
+              </a:rPr>
+              <a:t>© 2024–2026 Datacendia, LLC</a:t>
+            </a:r>
+            <a:endParaRPr lang="en-US" sz="800" dirty="0"/>
+          </a:p>
+        </p:txBody>
+      </p:sp>
+      <p:sp>
+        <p:nvSpPr>
+          <p:cNvPr id="9" name="Text 6"/>
+          <p:cNvSpPr/>
+          <p:nvPr/>
+        </p:nvSpPr>
+        <p:spPr>
+          <a:xfrm>
+            <a:off x="8229600" y="6400800"/>
+            <a:ext cx="3657600" cy="274320"/>
+          </a:xfrm>
+          <a:prstGeom prst="rect">
+            <a:avLst/>
+          </a:prstGeom>
+          <a:noFill/>
+          <a:ln/>
+        </p:spPr>
+        <p:txBody>
+          <a:bodyPr wrap="square" rtlCol="0" anchor="ctr"/>
+          <a:lstStyle/>
+          <a:p>
+            <a:pPr algn="r" indent="0" marL="0">
+              <a:buNone/>
+            </a:pPr>
+            <a:r>
+              <a:rPr lang="en-US" sz="800" dirty="0">
+                <a:solidFill>
+                  <a:srgbClr val="8B8FA3"/>
+                </a:solidFill>
+              </a:rPr>
+              <a:t>datacendia.com</a:t>
+            </a:r>
+            <a:endParaRPr lang="en-US" sz="800" dirty="0"/>
+          </a:p>
+        </p:txBody>
+      </p:sp>
       <p:pic>
         <p:nvPicPr>
-          <p:cNvPr id="7" name="Image 0" descr="preencoded.png">    </p:cNvPr>
+          <p:cNvPr id="10" name="Picture 9" descr="image.png"/>
           <p:cNvPicPr>
             <a:picLocks noChangeAspect="1"/>
           </p:cNvPicPr>
@@ -5961,78 +6033,6 @@
           </a:prstGeom>
         </p:spPr>
       </p:pic>
-      <p:sp>
-        <p:nvSpPr>
-          <p:cNvPr id="8" name="Text 5"/>
-          <p:cNvSpPr/>
-          <p:nvPr/>
-        </p:nvSpPr>
-        <p:spPr>
-          <a:xfrm>
-            <a:off x="457200" y="6400800"/>
-            <a:ext cx="3657600" cy="274320"/>
-          </a:xfrm>
-          <a:prstGeom prst="rect">
-            <a:avLst/>
-          </a:prstGeom>
-          <a:noFill/>
-          <a:ln/>
-        </p:spPr>
-        <p:txBody>
-          <a:bodyPr wrap="square" rtlCol="0" anchor="ctr"/>
-          <a:lstStyle/>
-          <a:p>
-            <a:pPr indent="0" marL="0">
-              <a:buNone/>
-            </a:pPr>
-            <a:r>
-              <a:rPr lang="en-US" sz="800" dirty="0">
-                <a:solidFill>
-                  <a:srgbClr val="8B8FA3"/>
-                </a:solidFill>
-              </a:rPr>
-              <a:t>© 2024–2026 Datacendia, LLC</a:t>
-            </a:r>
-            <a:endParaRPr lang="en-US" sz="800" dirty="0"/>
-          </a:p>
-        </p:txBody>
-      </p:sp>
-      <p:sp>
-        <p:nvSpPr>
-          <p:cNvPr id="9" name="Text 6"/>
-          <p:cNvSpPr/>
-          <p:nvPr/>
-        </p:nvSpPr>
-        <p:spPr>
-          <a:xfrm>
-            <a:off x="8229600" y="6400800"/>
-            <a:ext cx="3657600" cy="274320"/>
-          </a:xfrm>
-          <a:prstGeom prst="rect">
-            <a:avLst/>
-          </a:prstGeom>
-          <a:noFill/>
-          <a:ln/>
-        </p:spPr>
-        <p:txBody>
-          <a:bodyPr wrap="square" rtlCol="0" anchor="ctr"/>
-          <a:lstStyle/>
-          <a:p>
-            <a:pPr algn="r" indent="0" marL="0">
-              <a:buNone/>
-            </a:pPr>
-            <a:r>
-              <a:rPr lang="en-US" sz="800" dirty="0">
-                <a:solidFill>
-                  <a:srgbClr val="8B8FA3"/>
-                </a:solidFill>
-              </a:rPr>
-              <a:t>datacendia.com</a:t>
-            </a:r>
-            <a:endParaRPr lang="en-US" sz="800" dirty="0"/>
-          </a:p>
-        </p:txBody>
-      </p:sp>
     </p:spTree>
   </p:cSld>
   <p:clrMapOvr>

--- a/docs/pitch-decks/investor-100/pptx/090-sands-capital.pptx
+++ b/docs/pitch-decks/investor-100/pptx/090-sands-capital.pptx
@@ -7,6 +7,7 @@
   <p:sldIdLst>
     <p:sldId id="256" r:id="rId2"/>
     <p:sldId id="257" r:id="rId3"/>
+    <p:sldId id="266" r:id="rId17"/>
     <p:sldId id="258" r:id="rId4"/>
     <p:sldId id="259" r:id="rId5"/>
     <p:sldId id="260" r:id="rId6"/>
@@ -1769,6 +1770,10 @@
           </a:solidFill>
           <a:ln/>
         </p:spPr>
+        <p:txBody>
+          <a:bodyPr/>
+          <a:p/>
+        </p:txBody>
       </p:sp>
       <p:sp>
         <p:nvSpPr>
@@ -1936,6 +1941,10 @@
             <a:prstDash val="solid"/>
           </a:ln>
         </p:spPr>
+        <p:txBody>
+          <a:bodyPr/>
+          <a:p/>
+        </p:txBody>
       </p:sp>
       <p:sp>
         <p:nvSpPr>
@@ -2242,6 +2251,10 @@
           </a:solidFill>
           <a:ln/>
         </p:spPr>
+        <p:txBody>
+          <a:bodyPr/>
+          <a:p/>
+        </p:txBody>
       </p:sp>
       <p:sp>
         <p:nvSpPr>
@@ -2300,6 +2313,10 @@
           </a:solidFill>
           <a:ln/>
         </p:spPr>
+        <p:txBody>
+          <a:bodyPr/>
+          <a:p/>
+        </p:txBody>
       </p:sp>
       <p:sp>
         <p:nvSpPr>
@@ -2358,6 +2375,10 @@
           </a:solidFill>
           <a:ln/>
         </p:spPr>
+        <p:txBody>
+          <a:bodyPr/>
+          <a:p/>
+        </p:txBody>
       </p:sp>
       <p:sp>
         <p:nvSpPr>
@@ -2416,6 +2437,10 @@
           </a:solidFill>
           <a:ln/>
         </p:spPr>
+        <p:txBody>
+          <a:bodyPr/>
+          <a:p/>
+        </p:txBody>
       </p:sp>
       <p:sp>
         <p:nvSpPr>
@@ -2558,6 +2583,433 @@
               <a:t>datacendia.com</a:t>
             </a:r>
             <a:endParaRPr lang="en-US" sz="800" dirty="0"/>
+          </a:p>
+        </p:txBody>
+      </p:sp>
+    </p:spTree>
+  </p:cSld>
+  <p:clrMapOvr>
+    <a:masterClrMapping/>
+  </p:clrMapOvr>
+</p:sld>
+</file>
+
+<file path=ppt/slides/slide11.xml><?xml version="1.0" encoding="utf-8"?>
+<p:sld xmlns:a="http://schemas.openxmlformats.org/drawingml/2006/main" xmlns:p="http://schemas.openxmlformats.org/presentationml/2006/main" xmlns:r="http://schemas.openxmlformats.org/officeDocument/2006/relationships">
+  <p:cSld>
+    <p:spTree>
+      <p:nvGrpSpPr>
+        <p:cNvPr id="1" name=""/>
+        <p:cNvGrpSpPr/>
+        <p:nvPr/>
+      </p:nvGrpSpPr>
+      <p:grpSpPr/>
+      <p:sp>
+        <p:nvSpPr>
+          <p:cNvPr id="2" name="Rectangle 1"/>
+          <p:cNvSpPr/>
+          <p:nvPr/>
+        </p:nvSpPr>
+        <p:spPr>
+          <a:xfrm>
+            <a:off x="0" y="0"/>
+            <a:ext cx="12188952" cy="6858000"/>
+          </a:xfrm>
+          <a:prstGeom prst="rect">
+            <a:avLst/>
+          </a:prstGeom>
+          <a:solidFill>
+            <a:srgbClr val="0A0A0A"/>
+          </a:solidFill>
+          <a:ln>
+            <a:noFill/>
+          </a:ln>
+        </p:spPr>
+        <p:style>
+          <a:lnRef idx="1">
+            <a:schemeClr val="accent1"/>
+          </a:lnRef>
+          <a:fillRef idx="3">
+            <a:schemeClr val="accent1"/>
+          </a:fillRef>
+          <a:effectRef idx="2">
+            <a:schemeClr val="accent1"/>
+          </a:effectRef>
+          <a:fontRef idx="minor">
+            <a:schemeClr val="lt1"/>
+          </a:fontRef>
+        </p:style>
+        <p:txBody>
+          <a:bodyPr rtlCol="0" anchor="ctr"/>
+          <a:lstStyle/>
+          <a:p>
+            <a:pPr algn="ctr"/>
+          </a:p>
+        </p:txBody>
+      </p:sp>
+      <p:sp>
+        <p:nvSpPr>
+          <p:cNvPr id="3" name="TextBox 2"/>
+          <p:cNvSpPr txBox="1"/>
+          <p:nvPr/>
+        </p:nvSpPr>
+        <p:spPr>
+          <a:xfrm>
+            <a:off x="457200" y="274320"/>
+            <a:ext cx="10972800" cy="731520"/>
+          </a:xfrm>
+          <a:prstGeom prst="rect">
+            <a:avLst/>
+          </a:prstGeom>
+          <a:noFill/>
+        </p:spPr>
+        <p:txBody>
+          <a:bodyPr wrap="none">
+            <a:spAutoFit/>
+          </a:bodyPr>
+          <a:lstStyle/>
+          <a:p>
+            <a:pPr>
+              <a:defRPr sz="3600" b="1">
+                <a:solidFill>
+                  <a:srgbClr val="D4AF37"/>
+                </a:solidFill>
+              </a:defRPr>
+            </a:pPr>
+            <a:r>
+              <a:t>THE MARKET: Why Now, Why Big</a:t>
+            </a:r>
+          </a:p>
+        </p:txBody>
+      </p:sp>
+      <p:sp>
+        <p:nvSpPr>
+          <p:cNvPr id="4" name="TextBox 3"/>
+          <p:cNvSpPr txBox="1"/>
+          <p:nvPr/>
+        </p:nvSpPr>
+        <p:spPr>
+          <a:xfrm>
+            <a:off x="457200" y="914400"/>
+            <a:ext cx="10972800" cy="457200"/>
+          </a:xfrm>
+          <a:prstGeom prst="rect">
+            <a:avLst/>
+          </a:prstGeom>
+          <a:noFill/>
+        </p:spPr>
+        <p:txBody>
+          <a:bodyPr wrap="none">
+            <a:spAutoFit/>
+          </a:bodyPr>
+          <a:lstStyle/>
+          <a:p>
+            <a:pPr>
+              <a:defRPr sz="1800">
+                <a:solidFill>
+                  <a:srgbClr val="B4B4B4"/>
+                </a:solidFill>
+              </a:defRPr>
+            </a:pPr>
+            <a:r>
+              <a:t>Regulatory convergence creates a must-have moment for AI governance</a:t>
+            </a:r>
+          </a:p>
+        </p:txBody>
+      </p:sp>
+      <p:sp>
+        <p:nvSpPr>
+          <p:cNvPr id="5" name="TextBox 4"/>
+          <p:cNvSpPr txBox="1"/>
+          <p:nvPr/>
+        </p:nvSpPr>
+        <p:spPr>
+          <a:xfrm>
+            <a:off x="457200" y="1554480"/>
+            <a:ext cx="5029200" cy="457200"/>
+          </a:xfrm>
+          <a:prstGeom prst="rect">
+            <a:avLst/>
+          </a:prstGeom>
+          <a:noFill/>
+        </p:spPr>
+        <p:txBody>
+          <a:bodyPr wrap="none">
+            <a:spAutoFit/>
+          </a:bodyPr>
+          <a:lstStyle/>
+          <a:p>
+            <a:pPr>
+              <a:defRPr sz="2200" b="1">
+                <a:solidFill>
+                  <a:srgbClr val="FFFFFF"/>
+                </a:solidFill>
+              </a:defRPr>
+            </a:pPr>
+            <a:r>
+              <a:t>Regulatory Forcing Functions</a:t>
+            </a:r>
+          </a:p>
+        </p:txBody>
+      </p:sp>
+      <p:sp>
+        <p:nvSpPr>
+          <p:cNvPr id="6" name="TextBox 5"/>
+          <p:cNvSpPr txBox="1"/>
+          <p:nvPr/>
+        </p:nvSpPr>
+        <p:spPr>
+          <a:xfrm>
+            <a:off x="457200" y="2103120"/>
+            <a:ext cx="5029200" cy="4114800"/>
+          </a:xfrm>
+          <a:prstGeom prst="rect">
+            <a:avLst/>
+          </a:prstGeom>
+          <a:noFill/>
+        </p:spPr>
+        <p:txBody>
+          <a:bodyPr wrap="square">
+            <a:spAutoFit/>
+          </a:bodyPr>
+          <a:lstStyle/>
+          <a:p>
+            <a:pPr>
+              <a:spcAft>
+                <a:spcPts val="1000"/>
+              </a:spcAft>
+              <a:defRPr sz="1600">
+                <a:solidFill>
+                  <a:srgbClr val="FFFFFF"/>
+                </a:solidFill>
+              </a:defRPr>
+            </a:pPr>
+            <a:r>
+              <a:t>• EU AI Act — High-risk AI governance mandatory (Aug 2026)</a:t>
+            </a:r>
+          </a:p>
+          <a:p>
+            <a:pPr>
+              <a:spcAft>
+                <a:spcPts val="1000"/>
+              </a:spcAft>
+              <a:defRPr sz="1600">
+                <a:solidFill>
+                  <a:srgbClr val="FFFFFF"/>
+                </a:solidFill>
+              </a:defRPr>
+            </a:pPr>
+            <a:r>
+              <a:t>• Penalties: €35M or 7% of global turnover (Article 99(3))</a:t>
+            </a:r>
+          </a:p>
+          <a:p>
+            <a:pPr>
+              <a:spcAft>
+                <a:spcPts val="1000"/>
+              </a:spcAft>
+              <a:defRPr sz="1600">
+                <a:solidFill>
+                  <a:srgbClr val="FFFFFF"/>
+                </a:solidFill>
+              </a:defRPr>
+            </a:pPr>
+            <a:r>
+              <a:t>• SEC cyber disclosure — 4 business days to report</a:t>
+            </a:r>
+          </a:p>
+          <a:p>
+            <a:pPr>
+              <a:spcAft>
+                <a:spcPts val="1000"/>
+              </a:spcAft>
+              <a:defRPr sz="1600">
+                <a:solidFill>
+                  <a:srgbClr val="FFFFFF"/>
+                </a:solidFill>
+              </a:defRPr>
+            </a:pPr>
+            <a:r>
+              <a:t>• AI Executive Order 14110 — federal AI transparency</a:t>
+            </a:r>
+          </a:p>
+          <a:p>
+            <a:pPr>
+              <a:spcAft>
+                <a:spcPts val="1000"/>
+              </a:spcAft>
+              <a:defRPr sz="1600">
+                <a:solidFill>
+                  <a:srgbClr val="FFFFFF"/>
+                </a:solidFill>
+              </a:defRPr>
+            </a:pPr>
+            <a:r>
+              <a:t>• Peru DS 115-2025-PCM — AI governance enacted</a:t>
+            </a:r>
+          </a:p>
+          <a:p>
+            <a:pPr>
+              <a:spcAft>
+                <a:spcPts val="1000"/>
+              </a:spcAft>
+              <a:defRPr sz="1600">
+                <a:solidFill>
+                  <a:srgbClr val="FFFFFF"/>
+                </a:solidFill>
+              </a:defRPr>
+            </a:pPr>
+            <a:r>
+              <a:t>• DORA (Jan 2025) — ICT risk for EU financial services</a:t>
+            </a:r>
+          </a:p>
+        </p:txBody>
+      </p:sp>
+      <p:sp>
+        <p:nvSpPr>
+          <p:cNvPr id="7" name="TextBox 6"/>
+          <p:cNvSpPr txBox="1"/>
+          <p:nvPr/>
+        </p:nvSpPr>
+        <p:spPr>
+          <a:xfrm>
+            <a:off x="6217920" y="1554480"/>
+            <a:ext cx="5029200" cy="457200"/>
+          </a:xfrm>
+          <a:prstGeom prst="rect">
+            <a:avLst/>
+          </a:prstGeom>
+          <a:noFill/>
+        </p:spPr>
+        <p:txBody>
+          <a:bodyPr wrap="none">
+            <a:spAutoFit/>
+          </a:bodyPr>
+          <a:lstStyle/>
+          <a:p>
+            <a:pPr>
+              <a:defRPr sz="2200" b="1">
+                <a:solidFill>
+                  <a:srgbClr val="FFFFFF"/>
+                </a:solidFill>
+              </a:defRPr>
+            </a:pPr>
+            <a:r>
+              <a:t>The Opportunity</a:t>
+            </a:r>
+          </a:p>
+        </p:txBody>
+      </p:sp>
+      <p:sp>
+        <p:nvSpPr>
+          <p:cNvPr id="8" name="TextBox 7"/>
+          <p:cNvSpPr txBox="1"/>
+          <p:nvPr/>
+        </p:nvSpPr>
+        <p:spPr>
+          <a:xfrm>
+            <a:off x="6217920" y="2103120"/>
+            <a:ext cx="5029200" cy="4114800"/>
+          </a:xfrm>
+          <a:prstGeom prst="rect">
+            <a:avLst/>
+          </a:prstGeom>
+          <a:noFill/>
+        </p:spPr>
+        <p:txBody>
+          <a:bodyPr wrap="square">
+            <a:spAutoFit/>
+          </a:bodyPr>
+          <a:lstStyle/>
+          <a:p>
+            <a:pPr>
+              <a:spcAft>
+                <a:spcPts val="1000"/>
+              </a:spcAft>
+              <a:defRPr sz="1600">
+                <a:solidFill>
+                  <a:srgbClr val="FFFFFF"/>
+                </a:solidFill>
+              </a:defRPr>
+            </a:pPr>
+            <a:r>
+              <a:t>• Every enterprise deploying AI needs governance — not optional</a:t>
+            </a:r>
+          </a:p>
+          <a:p>
+            <a:pPr>
+              <a:spcAft>
+                <a:spcPts val="1000"/>
+              </a:spcAft>
+              <a:defRPr sz="1600">
+                <a:solidFill>
+                  <a:srgbClr val="FFFFFF"/>
+                </a:solidFill>
+              </a:defRPr>
+            </a:pPr>
+            <a:r>
+              <a:t>• 0 incumbent owns this category — greenfield</a:t>
+            </a:r>
+          </a:p>
+          <a:p>
+            <a:pPr>
+              <a:spcAft>
+                <a:spcPts val="1000"/>
+              </a:spcAft>
+              <a:defRPr sz="1600">
+                <a:solidFill>
+                  <a:srgbClr val="FFFFFF"/>
+                </a:solidFill>
+              </a:defRPr>
+            </a:pPr>
+            <a:r>
+              <a:t>• Financial services: Basel III + SR 11-7 + Reg BI</a:t>
+            </a:r>
+          </a:p>
+          <a:p>
+            <a:pPr>
+              <a:spcAft>
+                <a:spcPts val="1000"/>
+              </a:spcAft>
+              <a:defRPr sz="1600">
+                <a:solidFill>
+                  <a:srgbClr val="FFFFFF"/>
+                </a:solidFill>
+              </a:defRPr>
+            </a:pPr>
+            <a:r>
+              <a:t>• Healthcare: FDA SaMD + HIPAA audit requirements</a:t>
+            </a:r>
+          </a:p>
+          <a:p>
+            <a:pPr>
+              <a:spcAft>
+                <a:spcPts val="1000"/>
+              </a:spcAft>
+              <a:defRPr sz="1600">
+                <a:solidFill>
+                  <a:srgbClr val="FFFFFF"/>
+                </a:solidFill>
+              </a:defRPr>
+            </a:pPr>
+            <a:r>
+              <a:t>• Defense: FedRAMP + CMMC + ITAR</a:t>
+            </a:r>
+          </a:p>
+          <a:p>
+            <a:pPr>
+              <a:spcAft>
+                <a:spcPts val="1000"/>
+              </a:spcAft>
+              <a:defRPr sz="1600">
+                <a:solidFill>
+                  <a:srgbClr val="FFFFFF"/>
+                </a:solidFill>
+              </a:defRPr>
+            </a:pPr>
+            <a:r>
+              <a:t>• 12-18 month window before Big Tech bundles governance</a:t>
+            </a:r>
           </a:p>
         </p:txBody>
       </p:sp>
@@ -2797,6 +3249,10 @@
           </a:solidFill>
           <a:ln/>
         </p:spPr>
+        <p:txBody>
+          <a:bodyPr/>
+          <a:p/>
+        </p:txBody>
       </p:sp>
       <p:sp>
         <p:nvSpPr>
@@ -2894,6 +3350,10 @@
           </a:solidFill>
           <a:ln/>
         </p:spPr>
+        <p:txBody>
+          <a:bodyPr/>
+          <a:p/>
+        </p:txBody>
       </p:sp>
       <p:sp>
         <p:nvSpPr>
@@ -3409,6 +3869,10 @@
           </a:solidFill>
           <a:ln/>
         </p:spPr>
+        <p:txBody>
+          <a:bodyPr/>
+          <a:p/>
+        </p:txBody>
       </p:sp>
       <p:sp>
         <p:nvSpPr>
@@ -3503,6 +3967,10 @@
           </a:solidFill>
           <a:ln/>
         </p:spPr>
+        <p:txBody>
+          <a:bodyPr/>
+          <a:p/>
+        </p:txBody>
       </p:sp>
       <p:sp>
         <p:nvSpPr>
@@ -3597,6 +4065,10 @@
           </a:solidFill>
           <a:ln/>
         </p:spPr>
+        <p:txBody>
+          <a:bodyPr/>
+          <a:p/>
+        </p:txBody>
       </p:sp>
       <p:sp>
         <p:nvSpPr>
@@ -3691,6 +4163,10 @@
           </a:solidFill>
           <a:ln/>
         </p:spPr>
+        <p:txBody>
+          <a:bodyPr/>
+          <a:p/>
+        </p:txBody>
       </p:sp>
       <p:sp>
         <p:nvSpPr>
@@ -4127,6 +4603,10 @@
           </a:solidFill>
           <a:ln/>
         </p:spPr>
+        <p:txBody>
+          <a:bodyPr/>
+          <a:p/>
+        </p:txBody>
       </p:sp>
       <p:sp>
         <p:nvSpPr>
@@ -4221,6 +4701,10 @@
           </a:solidFill>
           <a:ln/>
         </p:spPr>
+        <p:txBody>
+          <a:bodyPr/>
+          <a:p/>
+        </p:txBody>
       </p:sp>
       <p:sp>
         <p:nvSpPr>
@@ -4279,6 +4763,10 @@
           </a:solidFill>
           <a:ln/>
         </p:spPr>
+        <p:txBody>
+          <a:bodyPr/>
+          <a:p/>
+        </p:txBody>
       </p:sp>
       <p:sp>
         <p:nvSpPr>
@@ -4588,6 +5076,10 @@
           </a:solidFill>
           <a:ln/>
         </p:spPr>
+        <p:txBody>
+          <a:bodyPr/>
+          <a:p/>
+        </p:txBody>
       </p:sp>
       <p:sp>
         <p:nvSpPr>
@@ -4682,6 +5174,10 @@
           </a:solidFill>
           <a:ln/>
         </p:spPr>
+        <p:txBody>
+          <a:bodyPr/>
+          <a:p/>
+        </p:txBody>
       </p:sp>
       <p:sp>
         <p:nvSpPr>
@@ -4776,6 +5272,10 @@
           </a:solidFill>
           <a:ln/>
         </p:spPr>
+        <p:txBody>
+          <a:bodyPr/>
+          <a:p/>
+        </p:txBody>
       </p:sp>
       <p:sp>
         <p:nvSpPr>
@@ -4870,6 +5370,10 @@
           </a:solidFill>
           <a:ln/>
         </p:spPr>
+        <p:txBody>
+          <a:bodyPr/>
+          <a:p/>
+        </p:txBody>
       </p:sp>
       <p:sp>
         <p:nvSpPr>
@@ -4964,6 +5468,10 @@
           </a:solidFill>
           <a:ln/>
         </p:spPr>
+        <p:txBody>
+          <a:bodyPr/>
+          <a:p/>
+        </p:txBody>
       </p:sp>
       <p:sp>
         <p:nvSpPr>
@@ -5058,6 +5566,10 @@
           </a:solidFill>
           <a:ln/>
         </p:spPr>
+        <p:txBody>
+          <a:bodyPr/>
+          <a:p/>
+        </p:txBody>
       </p:sp>
       <p:sp>
         <p:nvSpPr>
@@ -5172,6 +5684,10 @@
           </a:solidFill>
           <a:ln/>
         </p:spPr>
+        <p:txBody>
+          <a:bodyPr/>
+          <a:p/>
+        </p:txBody>
       </p:sp>
       <p:sp>
         <p:nvSpPr>
@@ -6306,6 +6822,10 @@
           </a:solidFill>
           <a:ln/>
         </p:spPr>
+        <p:txBody>
+          <a:bodyPr/>
+          <a:p/>
+        </p:txBody>
       </p:sp>
       <p:sp>
         <p:nvSpPr>
@@ -6615,6 +7135,10 @@
           </a:solidFill>
           <a:ln/>
         </p:spPr>
+        <p:txBody>
+          <a:bodyPr/>
+          <a:p/>
+        </p:txBody>
       </p:sp>
       <p:sp>
         <p:nvSpPr>
@@ -6712,6 +7236,10 @@
           </a:solidFill>
           <a:ln/>
         </p:spPr>
+        <p:txBody>
+          <a:bodyPr/>
+          <a:p/>
+        </p:txBody>
       </p:sp>
       <p:sp>
         <p:nvSpPr>
@@ -6782,7 +7310,7 @@
                   <a:srgbClr val="8B8FA3"/>
                 </a:solidFill>
               </a:rPr>
-              <a:t>2 warm enterprise intros (financial institution, Big 4 channel). NVIDIA Inception member.</a:t>
+              <a:t>Active pipeline: KPMG channel partner (Peru financial services), enterprise prospect via Opal Collection introduction. NVIDIA Inception member.</a:t>
             </a:r>
             <a:endParaRPr lang="en-US" sz="1100" dirty="0"/>
           </a:p>
@@ -6809,6 +7337,10 @@
           </a:solidFill>
           <a:ln/>
         </p:spPr>
+        <p:txBody>
+          <a:bodyPr/>
+          <a:p/>
+        </p:txBody>
       </p:sp>
       <p:sp>
         <p:nvSpPr>
@@ -6915,7 +7447,7 @@
                   <a:srgbClr val="8B8FA3"/>
                 </a:solidFill>
               </a:rPr>
-              <a:t>$8.5M post-money · 21.5% dilution · Engineering risk resolved — GTM-stage investment.</a:t>
+              <a:t>$8.5M post-money · 17.6% dilution · Engineering risk resolved — GTM-stage investment.</a:t>
             </a:r>
             <a:endParaRPr lang="en-US" sz="1200" dirty="0"/>
           </a:p>

--- a/docs/pitch-decks/investor-100/pptx/090-sands-capital.pptx
+++ b/docs/pitch-decks/investor-100/pptx/090-sands-capital.pptx
@@ -5425,6 +5425,30 @@
           </a:p>
         </p:txBody>
       </p:sp>
+      <p:pic>
+        <p:nvPicPr>
+          <p:cNvPr id="28" name="Picture 27" descr="nvidia-inception-program-badge-rgb-for-screen.png"/>
+          <p:cNvPicPr>
+            <a:picLocks noChangeAspect="1"/>
+          </p:cNvPicPr>
+          <p:nvPr/>
+        </p:nvPicPr>
+        <p:blipFill>
+          <a:blip r:embed="rId3"/>
+          <a:stretch>
+            <a:fillRect/>
+          </a:stretch>
+        </p:blipFill>
+        <p:spPr>
+          <a:xfrm>
+            <a:off x="4892040" y="4023360"/>
+            <a:ext cx="1645920" cy="822960"/>
+          </a:xfrm>
+          <a:prstGeom prst="rect">
+            <a:avLst/>
+          </a:prstGeom>
+        </p:spPr>
+      </p:pic>
     </p:spTree>
   </p:cSld>
   <p:clrMapOvr>

--- a/docs/pitch-decks/investor-100/pptx/090-sands-capital.pptx
+++ b/docs/pitch-decks/investor-100/pptx/090-sands-capital.pptx
@@ -1769,10 +1769,6 @@
           </a:solidFill>
           <a:ln/>
         </p:spPr>
-        <p:txBody>
-          <a:bodyPr/>
-          <a:p/>
-        </p:txBody>
       </p:sp>
       <p:sp>
         <p:nvSpPr>
@@ -1912,7 +1908,7 @@
                   <a:srgbClr val="8B8FA3"/>
                 </a:solidFill>
               </a:rPr>
-              <a:t>Decision Evidence Infrastructure for AI Systems</a:t>
+              <a:t>Decision Crisis Immunization Infrastructure</a:t>
             </a:r>
             <a:endParaRPr lang="en-US" sz="1500" dirty="0"/>
           </a:p>
@@ -1940,10 +1936,6 @@
             <a:prstDash val="solid"/>
           </a:ln>
         </p:spPr>
-        <p:txBody>
-          <a:bodyPr/>
-          <a:p/>
-        </p:txBody>
       </p:sp>
       <p:sp>
         <p:nvSpPr>
@@ -2223,7 +2215,7 @@
                   <a:srgbClr val="8B8FA3"/>
                 </a:solidFill>
               </a:rPr>
-              <a:t>Prepared for Sands Capital — Durable cryptographic moat + massive expanding TAM</a:t>
+              <a:t>Personalized for Sands Capital — Durable cryptographic moat + massive expanding TAM</a:t>
             </a:r>
             <a:endParaRPr lang="en-US" sz="1400" dirty="0"/>
           </a:p>
@@ -2250,10 +2242,6 @@
           </a:solidFill>
           <a:ln/>
         </p:spPr>
-        <p:txBody>
-          <a:bodyPr/>
-          <a:p/>
-        </p:txBody>
       </p:sp>
       <p:sp>
         <p:nvSpPr>
@@ -2312,10 +2300,6 @@
           </a:solidFill>
           <a:ln/>
         </p:spPr>
-        <p:txBody>
-          <a:bodyPr/>
-          <a:p/>
-        </p:txBody>
       </p:sp>
       <p:sp>
         <p:nvSpPr>
@@ -2374,10 +2358,6 @@
           </a:solidFill>
           <a:ln/>
         </p:spPr>
-        <p:txBody>
-          <a:bodyPr/>
-          <a:p/>
-        </p:txBody>
       </p:sp>
       <p:sp>
         <p:nvSpPr>
@@ -2436,10 +2416,6 @@
           </a:solidFill>
           <a:ln/>
         </p:spPr>
-        <p:txBody>
-          <a:bodyPr/>
-          <a:p/>
-        </p:txBody>
       </p:sp>
       <p:sp>
         <p:nvSpPr>
@@ -2821,10 +2797,6 @@
           </a:solidFill>
           <a:ln/>
         </p:spPr>
-        <p:txBody>
-          <a:bodyPr/>
-          <a:p/>
-        </p:txBody>
       </p:sp>
       <p:sp>
         <p:nvSpPr>
@@ -2922,10 +2894,6 @@
           </a:solidFill>
           <a:ln/>
         </p:spPr>
-        <p:txBody>
-          <a:bodyPr/>
-          <a:p/>
-        </p:txBody>
       </p:sp>
       <p:sp>
         <p:nvSpPr>
@@ -3302,7 +3270,7 @@
                   <a:srgbClr val="FFFFFF"/>
                 </a:solidFill>
               </a:rPr>
-              <a:t>Enterprise AI Has No Decision Evidence Layer</a:t>
+              <a:t>Enterprise AI Has No Accountability Layer</a:t>
             </a:r>
             <a:endParaRPr lang="en-US" sz="2400" dirty="0"/>
           </a:p>
@@ -3342,7 +3310,7 @@
                   <a:srgbClr val="8B8FA3"/>
                 </a:solidFill>
               </a:rPr>
-              <a:t>Every enterprise deploying AI will be required to produce decision evidence under regulatory or legal challenge — and no platform exists to generate it</a:t>
+              <a:t>AI systems make high-stakes decisions with no audit trail, no evidence, and no dissent tracking</a:t>
             </a:r>
             <a:endParaRPr lang="en-US" sz="1300" dirty="0"/>
           </a:p>
@@ -3396,7 +3364,7 @@
                   <a:srgbClr val="8B8FA3"/>
                 </a:solidFill>
               </a:rPr>
-              <a:t>No widely adopted platform provides cryptographically verifiable decision evidence at the decision level</a:t>
+              <a:t>No existing platform provides cryptographic proof of AI-assisted decisions</a:t>
             </a:r>
             <a:endParaRPr lang="en-US" sz="1300" dirty="0"/>
           </a:p>
@@ -3441,10 +3409,6 @@
           </a:solidFill>
           <a:ln/>
         </p:spPr>
-        <p:txBody>
-          <a:bodyPr/>
-          <a:p/>
-        </p:txBody>
       </p:sp>
       <p:sp>
         <p:nvSpPr>
@@ -3539,10 +3503,6 @@
           </a:solidFill>
           <a:ln/>
         </p:spPr>
-        <p:txBody>
-          <a:bodyPr/>
-          <a:p/>
-        </p:txBody>
       </p:sp>
       <p:sp>
         <p:nvSpPr>
@@ -3610,7 +3570,7 @@
                   <a:srgbClr val="8B8FA3"/>
                 </a:solidFill>
               </a:rPr>
-              <a:t>Widely adopted decision-evidence platforms</a:t>
+              <a:t>Platforms w/ crypto AI evidence</a:t>
             </a:r>
             <a:endParaRPr lang="en-US" sz="900" dirty="0"/>
           </a:p>
@@ -3637,10 +3597,6 @@
           </a:solidFill>
           <a:ln/>
         </p:spPr>
-        <p:txBody>
-          <a:bodyPr/>
-          <a:p/>
-        </p:txBody>
       </p:sp>
       <p:sp>
         <p:nvSpPr>
@@ -3735,10 +3691,6 @@
           </a:solidFill>
           <a:ln/>
         </p:spPr>
-        <p:txBody>
-          <a:bodyPr/>
-          <a:p/>
-        </p:txBody>
       </p:sp>
       <p:sp>
         <p:nvSpPr>
@@ -4175,10 +4127,6 @@
           </a:solidFill>
           <a:ln/>
         </p:spPr>
-        <p:txBody>
-          <a:bodyPr/>
-          <a:p/>
-        </p:txBody>
       </p:sp>
       <p:sp>
         <p:nvSpPr>
@@ -4273,10 +4221,6 @@
           </a:solidFill>
           <a:ln/>
         </p:spPr>
-        <p:txBody>
-          <a:bodyPr/>
-          <a:p/>
-        </p:txBody>
       </p:sp>
       <p:sp>
         <p:nvSpPr>
@@ -4335,10 +4279,6 @@
           </a:solidFill>
           <a:ln/>
         </p:spPr>
-        <p:txBody>
-          <a:bodyPr/>
-          <a:p/>
-        </p:txBody>
       </p:sp>
       <p:sp>
         <p:nvSpPr>
@@ -4370,7 +4310,7 @@
                   <a:srgbClr val="D4AF37"/>
                 </a:solidFill>
               </a:rPr>
-              <a:t>Why This Must Exist Now</a:t>
+              <a:t>90-Day Guarantee</a:t>
             </a:r>
             <a:endParaRPr lang="en-US" sz="1300" dirty="0"/>
           </a:p>
@@ -4409,7 +4349,7 @@
                   <a:srgbClr val="8B8FA3"/>
                 </a:solidFill>
               </a:rPr>
-              <a:t>EU AI Act (2025–2026) → enforceable auditability requirements. DORA → operational traceability for financial services. Litigation risk → retrospective scrutiny of AI decisions. Enterprise AI adoption → exploding unaudited decision surface. This creates a new infrastructure requirement: decision evidence.</a:t>
+              <a:t>Deploy Datacendia for 90 days on a single strategic problem. If the Council doesn't identify at least 3 critical risks you missed, we refund the pilot fee.</a:t>
             </a:r>
             <a:endParaRPr lang="en-US" sz="1000" dirty="0"/>
           </a:p>
@@ -4648,10 +4588,6 @@
           </a:solidFill>
           <a:ln/>
         </p:spPr>
-        <p:txBody>
-          <a:bodyPr/>
-          <a:p/>
-        </p:txBody>
       </p:sp>
       <p:sp>
         <p:nvSpPr>
@@ -4746,10 +4682,6 @@
           </a:solidFill>
           <a:ln/>
         </p:spPr>
-        <p:txBody>
-          <a:bodyPr/>
-          <a:p/>
-        </p:txBody>
       </p:sp>
       <p:sp>
         <p:nvSpPr>
@@ -4844,10 +4776,6 @@
           </a:solidFill>
           <a:ln/>
         </p:spPr>
-        <p:txBody>
-          <a:bodyPr/>
-          <a:p/>
-        </p:txBody>
       </p:sp>
       <p:sp>
         <p:nvSpPr>
@@ -4942,10 +4870,6 @@
           </a:solidFill>
           <a:ln/>
         </p:spPr>
-        <p:txBody>
-          <a:bodyPr/>
-          <a:p/>
-        </p:txBody>
       </p:sp>
       <p:sp>
         <p:nvSpPr>
@@ -5040,10 +4964,6 @@
           </a:solidFill>
           <a:ln/>
         </p:spPr>
-        <p:txBody>
-          <a:bodyPr/>
-          <a:p/>
-        </p:txBody>
       </p:sp>
       <p:sp>
         <p:nvSpPr>
@@ -5138,10 +5058,6 @@
           </a:solidFill>
           <a:ln/>
         </p:spPr>
-        <p:txBody>
-          <a:bodyPr/>
-          <a:p/>
-        </p:txBody>
       </p:sp>
       <p:sp>
         <p:nvSpPr>
@@ -5256,10 +5172,6 @@
           </a:solidFill>
           <a:ln/>
         </p:spPr>
-        <p:txBody>
-          <a:bodyPr/>
-          <a:p/>
-        </p:txBody>
       </p:sp>
       <p:sp>
         <p:nvSpPr>
@@ -5347,7 +5259,7 @@
                   <a:srgbClr val="8B8FA3"/>
                 </a:solidFill>
               </a:rPr>
-              <a:t>DGX Cloud access, technical mentorship, co-marketing, and enterprise customer introductions.</a:t>
+              <a:t>DGX Cloud access, technical mentorship, and co-marketing opportunities.</a:t>
             </a:r>
             <a:endParaRPr lang="en-US" sz="1100" dirty="0"/>
           </a:p>
@@ -5425,30 +5337,6 @@
           </a:p>
         </p:txBody>
       </p:sp>
-      <p:pic>
-        <p:nvPicPr>
-          <p:cNvPr id="28" name="Picture 27" descr="nvidia-inception-program-badge-rgb-for-screen.png"/>
-          <p:cNvPicPr>
-            <a:picLocks noChangeAspect="1"/>
-          </p:cNvPicPr>
-          <p:nvPr/>
-        </p:nvPicPr>
-        <p:blipFill>
-          <a:blip r:embed="rId3"/>
-          <a:stretch>
-            <a:fillRect/>
-          </a:stretch>
-        </p:blipFill>
-        <p:spPr>
-          <a:xfrm>
-            <a:off x="4892040" y="4023360"/>
-            <a:ext cx="1645920" cy="822960"/>
-          </a:xfrm>
-          <a:prstGeom prst="rect">
-            <a:avLst/>
-          </a:prstGeom>
-        </p:spPr>
-      </p:pic>
     </p:spTree>
   </p:cSld>
   <p:clrMapOvr>
@@ -5701,81 +5589,9 @@
           </a:p>
         </p:txBody>
       </p:sp>
-      <p:sp>
-        <p:nvSpPr>
-          <p:cNvPr id="8" name="Text 5"/>
-          <p:cNvSpPr/>
-          <p:nvPr/>
-        </p:nvSpPr>
-        <p:spPr>
-          <a:xfrm>
-            <a:off x="457200" y="6400800"/>
-            <a:ext cx="3657600" cy="274320"/>
-          </a:xfrm>
-          <a:prstGeom prst="rect">
-            <a:avLst/>
-          </a:prstGeom>
-          <a:noFill/>
-          <a:ln/>
-        </p:spPr>
-        <p:txBody>
-          <a:bodyPr wrap="square" rtlCol="0" anchor="ctr"/>
-          <a:lstStyle/>
-          <a:p>
-            <a:pPr indent="0" marL="0">
-              <a:buNone/>
-            </a:pPr>
-            <a:r>
-              <a:rPr lang="en-US" sz="800" dirty="0">
-                <a:solidFill>
-                  <a:srgbClr val="8B8FA3"/>
-                </a:solidFill>
-              </a:rPr>
-              <a:t>© 2024–2026 Datacendia, LLC</a:t>
-            </a:r>
-            <a:endParaRPr lang="en-US" sz="800" dirty="0"/>
-          </a:p>
-        </p:txBody>
-      </p:sp>
-      <p:sp>
-        <p:nvSpPr>
-          <p:cNvPr id="9" name="Text 6"/>
-          <p:cNvSpPr/>
-          <p:nvPr/>
-        </p:nvSpPr>
-        <p:spPr>
-          <a:xfrm>
-            <a:off x="8229600" y="6400800"/>
-            <a:ext cx="3657600" cy="274320"/>
-          </a:xfrm>
-          <a:prstGeom prst="rect">
-            <a:avLst/>
-          </a:prstGeom>
-          <a:noFill/>
-          <a:ln/>
-        </p:spPr>
-        <p:txBody>
-          <a:bodyPr wrap="square" rtlCol="0" anchor="ctr"/>
-          <a:lstStyle/>
-          <a:p>
-            <a:pPr algn="r" indent="0" marL="0">
-              <a:buNone/>
-            </a:pPr>
-            <a:r>
-              <a:rPr lang="en-US" sz="800" dirty="0">
-                <a:solidFill>
-                  <a:srgbClr val="8B8FA3"/>
-                </a:solidFill>
-              </a:rPr>
-              <a:t>datacendia.com</a:t>
-            </a:r>
-            <a:endParaRPr lang="en-US" sz="800" dirty="0"/>
-          </a:p>
-        </p:txBody>
-      </p:sp>
       <p:pic>
         <p:nvPicPr>
-          <p:cNvPr id="10" name="Picture 9" descr="image.png"/>
+          <p:cNvPr id="7" name="Image 0" descr="preencoded.png">    </p:cNvPr>
           <p:cNvPicPr>
             <a:picLocks noChangeAspect="1"/>
           </p:cNvPicPr>
@@ -5797,6 +5613,78 @@
           </a:prstGeom>
         </p:spPr>
       </p:pic>
+      <p:sp>
+        <p:nvSpPr>
+          <p:cNvPr id="8" name="Text 5"/>
+          <p:cNvSpPr/>
+          <p:nvPr/>
+        </p:nvSpPr>
+        <p:spPr>
+          <a:xfrm>
+            <a:off x="457200" y="6400800"/>
+            <a:ext cx="3657600" cy="274320"/>
+          </a:xfrm>
+          <a:prstGeom prst="rect">
+            <a:avLst/>
+          </a:prstGeom>
+          <a:noFill/>
+          <a:ln/>
+        </p:spPr>
+        <p:txBody>
+          <a:bodyPr wrap="square" rtlCol="0" anchor="ctr"/>
+          <a:lstStyle/>
+          <a:p>
+            <a:pPr indent="0" marL="0">
+              <a:buNone/>
+            </a:pPr>
+            <a:r>
+              <a:rPr lang="en-US" sz="800" dirty="0">
+                <a:solidFill>
+                  <a:srgbClr val="8B8FA3"/>
+                </a:solidFill>
+              </a:rPr>
+              <a:t>© 2024–2026 Datacendia, LLC</a:t>
+            </a:r>
+            <a:endParaRPr lang="en-US" sz="800" dirty="0"/>
+          </a:p>
+        </p:txBody>
+      </p:sp>
+      <p:sp>
+        <p:nvSpPr>
+          <p:cNvPr id="9" name="Text 6"/>
+          <p:cNvSpPr/>
+          <p:nvPr/>
+        </p:nvSpPr>
+        <p:spPr>
+          <a:xfrm>
+            <a:off x="8229600" y="6400800"/>
+            <a:ext cx="3657600" cy="274320"/>
+          </a:xfrm>
+          <a:prstGeom prst="rect">
+            <a:avLst/>
+          </a:prstGeom>
+          <a:noFill/>
+          <a:ln/>
+        </p:spPr>
+        <p:txBody>
+          <a:bodyPr wrap="square" rtlCol="0" anchor="ctr"/>
+          <a:lstStyle/>
+          <a:p>
+            <a:pPr algn="r" indent="0" marL="0">
+              <a:buNone/>
+            </a:pPr>
+            <a:r>
+              <a:rPr lang="en-US" sz="800" dirty="0">
+                <a:solidFill>
+                  <a:srgbClr val="8B8FA3"/>
+                </a:solidFill>
+              </a:rPr>
+              <a:t>datacendia.com</a:t>
+            </a:r>
+            <a:endParaRPr lang="en-US" sz="800" dirty="0"/>
+          </a:p>
+        </p:txBody>
+      </p:sp>
     </p:spTree>
   </p:cSld>
   <p:clrMapOvr>
@@ -6049,81 +5937,9 @@
           </a:p>
         </p:txBody>
       </p:sp>
-      <p:sp>
-        <p:nvSpPr>
-          <p:cNvPr id="8" name="Text 5"/>
-          <p:cNvSpPr/>
-          <p:nvPr/>
-        </p:nvSpPr>
-        <p:spPr>
-          <a:xfrm>
-            <a:off x="457200" y="6400800"/>
-            <a:ext cx="3657600" cy="274320"/>
-          </a:xfrm>
-          <a:prstGeom prst="rect">
-            <a:avLst/>
-          </a:prstGeom>
-          <a:noFill/>
-          <a:ln/>
-        </p:spPr>
-        <p:txBody>
-          <a:bodyPr wrap="square" rtlCol="0" anchor="ctr"/>
-          <a:lstStyle/>
-          <a:p>
-            <a:pPr indent="0" marL="0">
-              <a:buNone/>
-            </a:pPr>
-            <a:r>
-              <a:rPr lang="en-US" sz="800" dirty="0">
-                <a:solidFill>
-                  <a:srgbClr val="8B8FA3"/>
-                </a:solidFill>
-              </a:rPr>
-              <a:t>© 2024–2026 Datacendia, LLC</a:t>
-            </a:r>
-            <a:endParaRPr lang="en-US" sz="800" dirty="0"/>
-          </a:p>
-        </p:txBody>
-      </p:sp>
-      <p:sp>
-        <p:nvSpPr>
-          <p:cNvPr id="9" name="Text 6"/>
-          <p:cNvSpPr/>
-          <p:nvPr/>
-        </p:nvSpPr>
-        <p:spPr>
-          <a:xfrm>
-            <a:off x="8229600" y="6400800"/>
-            <a:ext cx="3657600" cy="274320"/>
-          </a:xfrm>
-          <a:prstGeom prst="rect">
-            <a:avLst/>
-          </a:prstGeom>
-          <a:noFill/>
-          <a:ln/>
-        </p:spPr>
-        <p:txBody>
-          <a:bodyPr wrap="square" rtlCol="0" anchor="ctr"/>
-          <a:lstStyle/>
-          <a:p>
-            <a:pPr algn="r" indent="0" marL="0">
-              <a:buNone/>
-            </a:pPr>
-            <a:r>
-              <a:rPr lang="en-US" sz="800" dirty="0">
-                <a:solidFill>
-                  <a:srgbClr val="8B8FA3"/>
-                </a:solidFill>
-              </a:rPr>
-              <a:t>datacendia.com</a:t>
-            </a:r>
-            <a:endParaRPr lang="en-US" sz="800" dirty="0"/>
-          </a:p>
-        </p:txBody>
-      </p:sp>
       <p:pic>
         <p:nvPicPr>
-          <p:cNvPr id="10" name="Picture 9" descr="image.png"/>
+          <p:cNvPr id="7" name="Image 0" descr="preencoded.png">    </p:cNvPr>
           <p:cNvPicPr>
             <a:picLocks noChangeAspect="1"/>
           </p:cNvPicPr>
@@ -6145,6 +5961,78 @@
           </a:prstGeom>
         </p:spPr>
       </p:pic>
+      <p:sp>
+        <p:nvSpPr>
+          <p:cNvPr id="8" name="Text 5"/>
+          <p:cNvSpPr/>
+          <p:nvPr/>
+        </p:nvSpPr>
+        <p:spPr>
+          <a:xfrm>
+            <a:off x="457200" y="6400800"/>
+            <a:ext cx="3657600" cy="274320"/>
+          </a:xfrm>
+          <a:prstGeom prst="rect">
+            <a:avLst/>
+          </a:prstGeom>
+          <a:noFill/>
+          <a:ln/>
+        </p:spPr>
+        <p:txBody>
+          <a:bodyPr wrap="square" rtlCol="0" anchor="ctr"/>
+          <a:lstStyle/>
+          <a:p>
+            <a:pPr indent="0" marL="0">
+              <a:buNone/>
+            </a:pPr>
+            <a:r>
+              <a:rPr lang="en-US" sz="800" dirty="0">
+                <a:solidFill>
+                  <a:srgbClr val="8B8FA3"/>
+                </a:solidFill>
+              </a:rPr>
+              <a:t>© 2024–2026 Datacendia, LLC</a:t>
+            </a:r>
+            <a:endParaRPr lang="en-US" sz="800" dirty="0"/>
+          </a:p>
+        </p:txBody>
+      </p:sp>
+      <p:sp>
+        <p:nvSpPr>
+          <p:cNvPr id="9" name="Text 6"/>
+          <p:cNvSpPr/>
+          <p:nvPr/>
+        </p:nvSpPr>
+        <p:spPr>
+          <a:xfrm>
+            <a:off x="8229600" y="6400800"/>
+            <a:ext cx="3657600" cy="274320"/>
+          </a:xfrm>
+          <a:prstGeom prst="rect">
+            <a:avLst/>
+          </a:prstGeom>
+          <a:noFill/>
+          <a:ln/>
+        </p:spPr>
+        <p:txBody>
+          <a:bodyPr wrap="square" rtlCol="0" anchor="ctr"/>
+          <a:lstStyle/>
+          <a:p>
+            <a:pPr algn="r" indent="0" marL="0">
+              <a:buNone/>
+            </a:pPr>
+            <a:r>
+              <a:rPr lang="en-US" sz="800" dirty="0">
+                <a:solidFill>
+                  <a:srgbClr val="8B8FA3"/>
+                </a:solidFill>
+              </a:rPr>
+              <a:t>datacendia.com</a:t>
+            </a:r>
+            <a:endParaRPr lang="en-US" sz="800" dirty="0"/>
+          </a:p>
+        </p:txBody>
+      </p:sp>
     </p:spTree>
   </p:cSld>
   <p:clrMapOvr>
@@ -6418,10 +6306,6 @@
           </a:solidFill>
           <a:ln/>
         </p:spPr>
-        <p:txBody>
-          <a:bodyPr/>
-          <a:p/>
-        </p:txBody>
       </p:sp>
       <p:sp>
         <p:nvSpPr>
@@ -6731,10 +6615,6 @@
           </a:solidFill>
           <a:ln/>
         </p:spPr>
-        <p:txBody>
-          <a:bodyPr/>
-          <a:p/>
-        </p:txBody>
       </p:sp>
       <p:sp>
         <p:nvSpPr>
@@ -6832,10 +6712,6 @@
           </a:solidFill>
           <a:ln/>
         </p:spPr>
-        <p:txBody>
-          <a:bodyPr/>
-          <a:p/>
-        </p:txBody>
       </p:sp>
       <p:sp>
         <p:nvSpPr>
@@ -6906,7 +6782,7 @@
                   <a:srgbClr val="8B8FA3"/>
                 </a:solidFill>
               </a:rPr>
-              <a:t>Active enterprise design-partner conversations (financial institution, Big 4 channel). NVIDIA Inception member. 3 LOI-stage discussions.</a:t>
+              <a:t>NVIDIA Inception member. Live production platform at app.datacendia.com. Open-core Apache 2.0 foundation.</a:t>
             </a:r>
             <a:endParaRPr lang="en-US" sz="1100" dirty="0"/>
           </a:p>
@@ -6933,10 +6809,6 @@
           </a:solidFill>
           <a:ln/>
         </p:spPr>
-        <p:txBody>
-          <a:bodyPr/>
-          <a:p/>
-        </p:txBody>
       </p:sp>
       <p:sp>
         <p:nvSpPr>
@@ -7007,7 +6879,7 @@
                   <a:srgbClr val="8B8FA3"/>
                 </a:solidFill>
               </a:rPr>
-              <a:t>First 3 design partners signed, SOC 2 Type II certification, regulatory validation (EU AI Act compliance audit).</a:t>
+              <a:t>First enterprise pilots, SOC 2 Type II certification, EU AI Act regulatory validation.</a:t>
             </a:r>
             <a:endParaRPr lang="en-US" sz="1100" dirty="0"/>
           </a:p>

--- a/docs/pitch-decks/investor-100/pptx/090-sands-capital.pptx
+++ b/docs/pitch-decks/investor-100/pptx/090-sands-capital.pptx
@@ -1908,7 +1908,7 @@
                   <a:srgbClr val="8B8FA3"/>
                 </a:solidFill>
               </a:rPr>
-              <a:t>Decision Crisis Immunization Infrastructure</a:t>
+              <a:t>Sovereign AI Decision Evidence Infrastructure</a:t>
             </a:r>
             <a:endParaRPr lang="en-US" sz="1500" dirty="0"/>
           </a:p>
@@ -3346,7 +3346,7 @@
                   <a:srgbClr val="8B8FA3"/>
                 </a:solidFill>
               </a:rPr>
-              <a:t>DORA requires AI operational resilience for financial services by Jan 2025</a:t>
+              <a:t>DORA (in effect since Jan 2025) requires AI operational resilience for all financial services</a:t>
             </a:r>
             <a:endParaRPr lang="en-US" sz="1300" dirty="0"/>
           </a:p>
